--- a/assets/figures-editable/c1-c2/c2-e13.pptx
+++ b/assets/figures-editable/c1-c2/c2-e13.pptx
@@ -7,7 +7,7 @@
   <p:sldIdLst>
     <p:sldId id="256" r:id="rId7"/>
   </p:sldIdLst>
-  <p:sldSz cx="11948160" cy="7924799" type="screen4x3"/>
+  <p:sldSz cx="12191695" cy="6858000" type="screen4x3"/>
   <p:notesSz cx="6858000" cy="9144000"/>
   <p:defaultTextStyle>
     <a:defPPr>
@@ -3098,14 +3098,14 @@
       <p:grpSpPr/>
       <p:sp>
         <p:nvSpPr>
-          <p:cNvPr id="2" name="text1" descr="sci-ppt:C2-E13-001"/>
+          <p:cNvPr id="2" name="C2-E13 text 0" descr="sci-ppt:o000"/>
           <p:cNvSpPr txBox="1"/>
           <p:nvPr/>
         </p:nvSpPr>
         <p:spPr>
           <a:xfrm>
-            <a:off x="316992" y="268224"/>
-            <a:ext cx="11277600" cy="359054"/>
+            <a:off x="274320" y="118872"/>
+            <a:ext cx="11612880" cy="340105"/>
           </a:xfrm>
           <a:prstGeom prst="rect">
             <a:avLst/>
@@ -3114,7 +3114,7 @@
           <a:effectLst/>
         </p:spPr>
         <p:txBody>
-          <a:bodyPr wrap="none" lIns="27432" rIns="27432" tIns="18288" bIns="18288" anchor="ctr">
+          <a:bodyPr wrap="none" lIns="18288" rIns="18288" tIns="18288" bIns="18288" anchor="t">
             <a:spAutoFit/>
           </a:bodyPr>
           <a:lstStyle/>
@@ -3125,34 +3125,31 @@
               </a:spcAft>
             </a:pPr>
             <a:r>
-              <a:rPr sz="1823" b="0" i="0">
+              <a:rPr sz="1900" b="1" i="0">
                 <a:solidFill>
                   <a:srgbClr val="8EDBD4"/>
                 </a:solidFill>
                 <a:latin typeface="Arial"/>
               </a:rPr>
-              <a:t>C2-E13 | Physical-variable diagram</a:t>
-            </a:r>
-          </a:p>
-        </p:txBody>
-      </p:sp>
-      <p:sp>
-        <p:nvSpPr>
-          <p:cNvPr id="3" name="rect2" descr="sci-ppt:C2-E13-002"/>
-          <p:cNvSpPr/>
+              <a:t>C2-E13 · Verified empirical water property correlations</a:t>
+            </a:r>
+          </a:p>
+        </p:txBody>
+      </p:sp>
+      <p:cxnSp>
+        <p:nvCxnSpPr>
+          <p:cNvPr id="3" name="C2-E13 line 1" descr="sci-ppt:o001"/>
+          <p:cNvCxnSpPr/>
           <p:nvPr/>
-        </p:nvSpPr>
-        <p:spPr>
-          <a:xfrm>
-            <a:off x="975360" y="1706880"/>
-            <a:ext cx="3657600" cy="1219200"/>
-          </a:xfrm>
-          <a:prstGeom prst="rect">
+        </p:nvCxnSpPr>
+        <p:spPr>
+          <a:xfrm>
+            <a:off x="914400" y="5029200"/>
+            <a:ext cx="6583679" cy="0"/>
+          </a:xfrm>
+          <a:prstGeom prst="line">
             <a:avLst/>
           </a:prstGeom>
-          <a:solidFill>
-            <a:srgbClr val="213E4B"/>
-          </a:solidFill>
           <a:ln w="19050">
             <a:solidFill>
               <a:srgbClr val="B4C7D2"/>
@@ -3160,24 +3157,83 @@
           </a:ln>
           <a:effectLst/>
         </p:spPr>
-        <p:txBody>
-          <a:bodyPr rtlCol="0" anchor="ctr"/>
-          <a:lstStyle/>
-          <a:p>
-            <a:pPr algn="ctr"/>
-          </a:p>
-        </p:txBody>
-      </p:sp>
-      <p:sp>
-        <p:nvSpPr>
-          <p:cNvPr id="4" name="text3" descr="sci-ppt:C2-E13-003"/>
+      </p:cxnSp>
+      <p:cxnSp>
+        <p:nvCxnSpPr>
+          <p:cNvPr id="4" name="C2-E13 line 2" descr="sci-ppt:o002"/>
+          <p:cNvCxnSpPr/>
+          <p:nvPr/>
+        </p:nvCxnSpPr>
+        <p:spPr>
+          <a:xfrm>
+            <a:off x="914400" y="1371600"/>
+            <a:ext cx="0" cy="3657600"/>
+          </a:xfrm>
+          <a:prstGeom prst="line">
+            <a:avLst/>
+          </a:prstGeom>
+          <a:ln w="19050">
+            <a:solidFill>
+              <a:srgbClr val="B4C7D2"/>
+            </a:solidFill>
+          </a:ln>
+          <a:effectLst/>
+        </p:spPr>
+      </p:cxnSp>
+      <p:cxnSp>
+        <p:nvCxnSpPr>
+          <p:cNvPr id="5" name="C2-E13 line 3" descr="sci-ppt:o003"/>
+          <p:cNvCxnSpPr/>
+          <p:nvPr/>
+        </p:nvCxnSpPr>
+        <p:spPr>
+          <a:xfrm>
+            <a:off x="914400" y="5029200"/>
+            <a:ext cx="0" cy="64008"/>
+          </a:xfrm>
+          <a:prstGeom prst="line">
+            <a:avLst/>
+          </a:prstGeom>
+          <a:ln w="12700">
+            <a:solidFill>
+              <a:srgbClr val="B4C7D2"/>
+            </a:solidFill>
+          </a:ln>
+          <a:effectLst/>
+        </p:spPr>
+      </p:cxnSp>
+      <p:cxnSp>
+        <p:nvCxnSpPr>
+          <p:cNvPr id="6" name="C2-E13 line 4" descr="sci-ppt:o004"/>
+          <p:cNvCxnSpPr/>
+          <p:nvPr/>
+        </p:nvCxnSpPr>
+        <p:spPr>
+          <a:xfrm>
+            <a:off x="914400" y="1371600"/>
+            <a:ext cx="0" cy="3657600"/>
+          </a:xfrm>
+          <a:prstGeom prst="line">
+            <a:avLst/>
+          </a:prstGeom>
+          <a:ln w="7620">
+            <a:solidFill>
+              <a:srgbClr val="2E4756"/>
+            </a:solidFill>
+          </a:ln>
+          <a:effectLst/>
+        </p:spPr>
+      </p:cxnSp>
+      <p:sp>
+        <p:nvSpPr>
+          <p:cNvPr id="7" name="C2-E13 text 5" descr="sci-ppt:o005"/>
           <p:cNvSpPr txBox="1"/>
           <p:nvPr/>
         </p:nvSpPr>
         <p:spPr>
           <a:xfrm>
-            <a:off x="1097280" y="1828800"/>
-            <a:ext cx="3474720" cy="340156"/>
+            <a:off x="457200" y="5111496"/>
+            <a:ext cx="914400" cy="208407"/>
           </a:xfrm>
           <a:prstGeom prst="rect">
             <a:avLst/>
@@ -3186,7 +3242,927 @@
           <a:effectLst/>
         </p:spPr>
         <p:txBody>
-          <a:bodyPr wrap="none" lIns="27432" rIns="27432" tIns="18288" bIns="18288" anchor="ctr">
+          <a:bodyPr wrap="none" lIns="18288" rIns="18288" tIns="18288" bIns="18288" anchor="t">
+            <a:spAutoFit/>
+          </a:bodyPr>
+          <a:lstStyle/>
+          <a:p>
+            <a:pPr algn="ctr">
+              <a:spcAft>
+                <a:spcPts val="0"/>
+              </a:spcAft>
+            </a:pPr>
+            <a:r>
+              <a:rPr sz="1050" b="0" i="0">
+                <a:solidFill>
+                  <a:srgbClr val="B4C7D2"/>
+                </a:solidFill>
+                <a:latin typeface="Arial"/>
+              </a:rPr>
+              <a:t>270</a:t>
+            </a:r>
+          </a:p>
+        </p:txBody>
+      </p:sp>
+      <p:cxnSp>
+        <p:nvCxnSpPr>
+          <p:cNvPr id="8" name="C2-E13 line 6" descr="sci-ppt:o006"/>
+          <p:cNvCxnSpPr/>
+          <p:nvPr/>
+        </p:nvCxnSpPr>
+        <p:spPr>
+          <a:xfrm>
+            <a:off x="1854925" y="5029200"/>
+            <a:ext cx="0" cy="64008"/>
+          </a:xfrm>
+          <a:prstGeom prst="line">
+            <a:avLst/>
+          </a:prstGeom>
+          <a:ln w="12700">
+            <a:solidFill>
+              <a:srgbClr val="B4C7D2"/>
+            </a:solidFill>
+          </a:ln>
+          <a:effectLst/>
+        </p:spPr>
+      </p:cxnSp>
+      <p:cxnSp>
+        <p:nvCxnSpPr>
+          <p:cNvPr id="9" name="C2-E13 line 7" descr="sci-ppt:o007"/>
+          <p:cNvCxnSpPr/>
+          <p:nvPr/>
+        </p:nvCxnSpPr>
+        <p:spPr>
+          <a:xfrm>
+            <a:off x="1854925" y="1371600"/>
+            <a:ext cx="0" cy="3657600"/>
+          </a:xfrm>
+          <a:prstGeom prst="line">
+            <a:avLst/>
+          </a:prstGeom>
+          <a:ln w="7620">
+            <a:solidFill>
+              <a:srgbClr val="2E4756"/>
+            </a:solidFill>
+          </a:ln>
+          <a:effectLst/>
+        </p:spPr>
+      </p:cxnSp>
+      <p:sp>
+        <p:nvSpPr>
+          <p:cNvPr id="10" name="C2-E13 text 8" descr="sci-ppt:o008"/>
+          <p:cNvSpPr txBox="1"/>
+          <p:nvPr/>
+        </p:nvSpPr>
+        <p:spPr>
+          <a:xfrm>
+            <a:off x="1397725" y="5111496"/>
+            <a:ext cx="914400" cy="208407"/>
+          </a:xfrm>
+          <a:prstGeom prst="rect">
+            <a:avLst/>
+          </a:prstGeom>
+          <a:noFill/>
+          <a:effectLst/>
+        </p:spPr>
+        <p:txBody>
+          <a:bodyPr wrap="none" lIns="18288" rIns="18288" tIns="18288" bIns="18288" anchor="t">
+            <a:spAutoFit/>
+          </a:bodyPr>
+          <a:lstStyle/>
+          <a:p>
+            <a:pPr algn="ctr">
+              <a:spcAft>
+                <a:spcPts val="0"/>
+              </a:spcAft>
+            </a:pPr>
+            <a:r>
+              <a:rPr sz="1050" b="0" i="0">
+                <a:solidFill>
+                  <a:srgbClr val="B4C7D2"/>
+                </a:solidFill>
+                <a:latin typeface="Arial"/>
+              </a:rPr>
+              <a:t>280</a:t>
+            </a:r>
+          </a:p>
+        </p:txBody>
+      </p:sp>
+      <p:cxnSp>
+        <p:nvCxnSpPr>
+          <p:cNvPr id="11" name="C2-E13 line 9" descr="sci-ppt:o009"/>
+          <p:cNvCxnSpPr/>
+          <p:nvPr/>
+        </p:nvCxnSpPr>
+        <p:spPr>
+          <a:xfrm>
+            <a:off x="2795451" y="5029200"/>
+            <a:ext cx="0" cy="64008"/>
+          </a:xfrm>
+          <a:prstGeom prst="line">
+            <a:avLst/>
+          </a:prstGeom>
+          <a:ln w="12700">
+            <a:solidFill>
+              <a:srgbClr val="B4C7D2"/>
+            </a:solidFill>
+          </a:ln>
+          <a:effectLst/>
+        </p:spPr>
+      </p:cxnSp>
+      <p:cxnSp>
+        <p:nvCxnSpPr>
+          <p:cNvPr id="12" name="C2-E13 line 10" descr="sci-ppt:o010"/>
+          <p:cNvCxnSpPr/>
+          <p:nvPr/>
+        </p:nvCxnSpPr>
+        <p:spPr>
+          <a:xfrm>
+            <a:off x="2795451" y="1371600"/>
+            <a:ext cx="0" cy="3657600"/>
+          </a:xfrm>
+          <a:prstGeom prst="line">
+            <a:avLst/>
+          </a:prstGeom>
+          <a:ln w="7620">
+            <a:solidFill>
+              <a:srgbClr val="2E4756"/>
+            </a:solidFill>
+          </a:ln>
+          <a:effectLst/>
+        </p:spPr>
+      </p:cxnSp>
+      <p:sp>
+        <p:nvSpPr>
+          <p:cNvPr id="13" name="C2-E13 text 11" descr="sci-ppt:o011"/>
+          <p:cNvSpPr txBox="1"/>
+          <p:nvPr/>
+        </p:nvSpPr>
+        <p:spPr>
+          <a:xfrm>
+            <a:off x="2338251" y="5111496"/>
+            <a:ext cx="914400" cy="208407"/>
+          </a:xfrm>
+          <a:prstGeom prst="rect">
+            <a:avLst/>
+          </a:prstGeom>
+          <a:noFill/>
+          <a:effectLst/>
+        </p:spPr>
+        <p:txBody>
+          <a:bodyPr wrap="none" lIns="18288" rIns="18288" tIns="18288" bIns="18288" anchor="t">
+            <a:spAutoFit/>
+          </a:bodyPr>
+          <a:lstStyle/>
+          <a:p>
+            <a:pPr algn="ctr">
+              <a:spcAft>
+                <a:spcPts val="0"/>
+              </a:spcAft>
+            </a:pPr>
+            <a:r>
+              <a:rPr sz="1050" b="0" i="0">
+                <a:solidFill>
+                  <a:srgbClr val="B4C7D2"/>
+                </a:solidFill>
+                <a:latin typeface="Arial"/>
+              </a:rPr>
+              <a:t>290</a:t>
+            </a:r>
+          </a:p>
+        </p:txBody>
+      </p:sp>
+      <p:cxnSp>
+        <p:nvCxnSpPr>
+          <p:cNvPr id="14" name="C2-E13 line 12" descr="sci-ppt:o012"/>
+          <p:cNvCxnSpPr/>
+          <p:nvPr/>
+        </p:nvCxnSpPr>
+        <p:spPr>
+          <a:xfrm>
+            <a:off x="3735977" y="5029200"/>
+            <a:ext cx="0" cy="64008"/>
+          </a:xfrm>
+          <a:prstGeom prst="line">
+            <a:avLst/>
+          </a:prstGeom>
+          <a:ln w="12700">
+            <a:solidFill>
+              <a:srgbClr val="B4C7D2"/>
+            </a:solidFill>
+          </a:ln>
+          <a:effectLst/>
+        </p:spPr>
+      </p:cxnSp>
+      <p:cxnSp>
+        <p:nvCxnSpPr>
+          <p:cNvPr id="15" name="C2-E13 line 13" descr="sci-ppt:o013"/>
+          <p:cNvCxnSpPr/>
+          <p:nvPr/>
+        </p:nvCxnSpPr>
+        <p:spPr>
+          <a:xfrm>
+            <a:off x="3735977" y="1371600"/>
+            <a:ext cx="0" cy="3657600"/>
+          </a:xfrm>
+          <a:prstGeom prst="line">
+            <a:avLst/>
+          </a:prstGeom>
+          <a:ln w="7620">
+            <a:solidFill>
+              <a:srgbClr val="2E4756"/>
+            </a:solidFill>
+          </a:ln>
+          <a:effectLst/>
+        </p:spPr>
+      </p:cxnSp>
+      <p:sp>
+        <p:nvSpPr>
+          <p:cNvPr id="16" name="C2-E13 text 14" descr="sci-ppt:o014"/>
+          <p:cNvSpPr txBox="1"/>
+          <p:nvPr/>
+        </p:nvSpPr>
+        <p:spPr>
+          <a:xfrm>
+            <a:off x="3278777" y="5111496"/>
+            <a:ext cx="914400" cy="208407"/>
+          </a:xfrm>
+          <a:prstGeom prst="rect">
+            <a:avLst/>
+          </a:prstGeom>
+          <a:noFill/>
+          <a:effectLst/>
+        </p:spPr>
+        <p:txBody>
+          <a:bodyPr wrap="none" lIns="18288" rIns="18288" tIns="18288" bIns="18288" anchor="t">
+            <a:spAutoFit/>
+          </a:bodyPr>
+          <a:lstStyle/>
+          <a:p>
+            <a:pPr algn="ctr">
+              <a:spcAft>
+                <a:spcPts val="0"/>
+              </a:spcAft>
+            </a:pPr>
+            <a:r>
+              <a:rPr sz="1050" b="0" i="0">
+                <a:solidFill>
+                  <a:srgbClr val="B4C7D2"/>
+                </a:solidFill>
+                <a:latin typeface="Arial"/>
+              </a:rPr>
+              <a:t>300</a:t>
+            </a:r>
+          </a:p>
+        </p:txBody>
+      </p:sp>
+      <p:cxnSp>
+        <p:nvCxnSpPr>
+          <p:cNvPr id="17" name="C2-E13 line 15" descr="sci-ppt:o015"/>
+          <p:cNvCxnSpPr/>
+          <p:nvPr/>
+        </p:nvCxnSpPr>
+        <p:spPr>
+          <a:xfrm>
+            <a:off x="4676502" y="5029200"/>
+            <a:ext cx="0" cy="64008"/>
+          </a:xfrm>
+          <a:prstGeom prst="line">
+            <a:avLst/>
+          </a:prstGeom>
+          <a:ln w="12700">
+            <a:solidFill>
+              <a:srgbClr val="B4C7D2"/>
+            </a:solidFill>
+          </a:ln>
+          <a:effectLst/>
+        </p:spPr>
+      </p:cxnSp>
+      <p:cxnSp>
+        <p:nvCxnSpPr>
+          <p:cNvPr id="18" name="C2-E13 line 16" descr="sci-ppt:o016"/>
+          <p:cNvCxnSpPr/>
+          <p:nvPr/>
+        </p:nvCxnSpPr>
+        <p:spPr>
+          <a:xfrm>
+            <a:off x="4676502" y="1371600"/>
+            <a:ext cx="0" cy="3657600"/>
+          </a:xfrm>
+          <a:prstGeom prst="line">
+            <a:avLst/>
+          </a:prstGeom>
+          <a:ln w="7620">
+            <a:solidFill>
+              <a:srgbClr val="2E4756"/>
+            </a:solidFill>
+          </a:ln>
+          <a:effectLst/>
+        </p:spPr>
+      </p:cxnSp>
+      <p:sp>
+        <p:nvSpPr>
+          <p:cNvPr id="19" name="C2-E13 text 17" descr="sci-ppt:o017"/>
+          <p:cNvSpPr txBox="1"/>
+          <p:nvPr/>
+        </p:nvSpPr>
+        <p:spPr>
+          <a:xfrm>
+            <a:off x="4219302" y="5111496"/>
+            <a:ext cx="914400" cy="208407"/>
+          </a:xfrm>
+          <a:prstGeom prst="rect">
+            <a:avLst/>
+          </a:prstGeom>
+          <a:noFill/>
+          <a:effectLst/>
+        </p:spPr>
+        <p:txBody>
+          <a:bodyPr wrap="none" lIns="18288" rIns="18288" tIns="18288" bIns="18288" anchor="t">
+            <a:spAutoFit/>
+          </a:bodyPr>
+          <a:lstStyle/>
+          <a:p>
+            <a:pPr algn="ctr">
+              <a:spcAft>
+                <a:spcPts val="0"/>
+              </a:spcAft>
+            </a:pPr>
+            <a:r>
+              <a:rPr sz="1050" b="0" i="0">
+                <a:solidFill>
+                  <a:srgbClr val="B4C7D2"/>
+                </a:solidFill>
+                <a:latin typeface="Arial"/>
+              </a:rPr>
+              <a:t>310</a:t>
+            </a:r>
+          </a:p>
+        </p:txBody>
+      </p:sp>
+      <p:cxnSp>
+        <p:nvCxnSpPr>
+          <p:cNvPr id="20" name="C2-E13 line 18" descr="sci-ppt:o018"/>
+          <p:cNvCxnSpPr/>
+          <p:nvPr/>
+        </p:nvCxnSpPr>
+        <p:spPr>
+          <a:xfrm>
+            <a:off x="5617028" y="5029200"/>
+            <a:ext cx="0" cy="64008"/>
+          </a:xfrm>
+          <a:prstGeom prst="line">
+            <a:avLst/>
+          </a:prstGeom>
+          <a:ln w="12700">
+            <a:solidFill>
+              <a:srgbClr val="B4C7D2"/>
+            </a:solidFill>
+          </a:ln>
+          <a:effectLst/>
+        </p:spPr>
+      </p:cxnSp>
+      <p:cxnSp>
+        <p:nvCxnSpPr>
+          <p:cNvPr id="21" name="C2-E13 line 19" descr="sci-ppt:o019"/>
+          <p:cNvCxnSpPr/>
+          <p:nvPr/>
+        </p:nvCxnSpPr>
+        <p:spPr>
+          <a:xfrm>
+            <a:off x="5617028" y="1371600"/>
+            <a:ext cx="0" cy="3657600"/>
+          </a:xfrm>
+          <a:prstGeom prst="line">
+            <a:avLst/>
+          </a:prstGeom>
+          <a:ln w="7620">
+            <a:solidFill>
+              <a:srgbClr val="2E4756"/>
+            </a:solidFill>
+          </a:ln>
+          <a:effectLst/>
+        </p:spPr>
+      </p:cxnSp>
+      <p:sp>
+        <p:nvSpPr>
+          <p:cNvPr id="22" name="C2-E13 text 20" descr="sci-ppt:o020"/>
+          <p:cNvSpPr txBox="1"/>
+          <p:nvPr/>
+        </p:nvSpPr>
+        <p:spPr>
+          <a:xfrm>
+            <a:off x="5159828" y="5111496"/>
+            <a:ext cx="914400" cy="208407"/>
+          </a:xfrm>
+          <a:prstGeom prst="rect">
+            <a:avLst/>
+          </a:prstGeom>
+          <a:noFill/>
+          <a:effectLst/>
+        </p:spPr>
+        <p:txBody>
+          <a:bodyPr wrap="none" lIns="18288" rIns="18288" tIns="18288" bIns="18288" anchor="t">
+            <a:spAutoFit/>
+          </a:bodyPr>
+          <a:lstStyle/>
+          <a:p>
+            <a:pPr algn="ctr">
+              <a:spcAft>
+                <a:spcPts val="0"/>
+              </a:spcAft>
+            </a:pPr>
+            <a:r>
+              <a:rPr sz="1050" b="0" i="0">
+                <a:solidFill>
+                  <a:srgbClr val="B4C7D2"/>
+                </a:solidFill>
+                <a:latin typeface="Arial"/>
+              </a:rPr>
+              <a:t>320</a:t>
+            </a:r>
+          </a:p>
+        </p:txBody>
+      </p:sp>
+      <p:cxnSp>
+        <p:nvCxnSpPr>
+          <p:cNvPr id="23" name="C2-E13 line 21" descr="sci-ppt:o021"/>
+          <p:cNvCxnSpPr/>
+          <p:nvPr/>
+        </p:nvCxnSpPr>
+        <p:spPr>
+          <a:xfrm>
+            <a:off x="6557554" y="5029200"/>
+            <a:ext cx="0" cy="64008"/>
+          </a:xfrm>
+          <a:prstGeom prst="line">
+            <a:avLst/>
+          </a:prstGeom>
+          <a:ln w="12700">
+            <a:solidFill>
+              <a:srgbClr val="B4C7D2"/>
+            </a:solidFill>
+          </a:ln>
+          <a:effectLst/>
+        </p:spPr>
+      </p:cxnSp>
+      <p:cxnSp>
+        <p:nvCxnSpPr>
+          <p:cNvPr id="24" name="C2-E13 line 22" descr="sci-ppt:o022"/>
+          <p:cNvCxnSpPr/>
+          <p:nvPr/>
+        </p:nvCxnSpPr>
+        <p:spPr>
+          <a:xfrm>
+            <a:off x="6557554" y="1371600"/>
+            <a:ext cx="0" cy="3657600"/>
+          </a:xfrm>
+          <a:prstGeom prst="line">
+            <a:avLst/>
+          </a:prstGeom>
+          <a:ln w="7620">
+            <a:solidFill>
+              <a:srgbClr val="2E4756"/>
+            </a:solidFill>
+          </a:ln>
+          <a:effectLst/>
+        </p:spPr>
+      </p:cxnSp>
+      <p:sp>
+        <p:nvSpPr>
+          <p:cNvPr id="25" name="C2-E13 text 23" descr="sci-ppt:o023"/>
+          <p:cNvSpPr txBox="1"/>
+          <p:nvPr/>
+        </p:nvSpPr>
+        <p:spPr>
+          <a:xfrm>
+            <a:off x="6100354" y="5111496"/>
+            <a:ext cx="914400" cy="208407"/>
+          </a:xfrm>
+          <a:prstGeom prst="rect">
+            <a:avLst/>
+          </a:prstGeom>
+          <a:noFill/>
+          <a:effectLst/>
+        </p:spPr>
+        <p:txBody>
+          <a:bodyPr wrap="none" lIns="18288" rIns="18288" tIns="18288" bIns="18288" anchor="t">
+            <a:spAutoFit/>
+          </a:bodyPr>
+          <a:lstStyle/>
+          <a:p>
+            <a:pPr algn="ctr">
+              <a:spcAft>
+                <a:spcPts val="0"/>
+              </a:spcAft>
+            </a:pPr>
+            <a:r>
+              <a:rPr sz="1050" b="0" i="0">
+                <a:solidFill>
+                  <a:srgbClr val="B4C7D2"/>
+                </a:solidFill>
+                <a:latin typeface="Arial"/>
+              </a:rPr>
+              <a:t>330</a:t>
+            </a:r>
+          </a:p>
+        </p:txBody>
+      </p:sp>
+      <p:cxnSp>
+        <p:nvCxnSpPr>
+          <p:cNvPr id="26" name="C2-E13 line 24" descr="sci-ppt:o024"/>
+          <p:cNvCxnSpPr/>
+          <p:nvPr/>
+        </p:nvCxnSpPr>
+        <p:spPr>
+          <a:xfrm>
+            <a:off x="7498079" y="5029200"/>
+            <a:ext cx="0" cy="64008"/>
+          </a:xfrm>
+          <a:prstGeom prst="line">
+            <a:avLst/>
+          </a:prstGeom>
+          <a:ln w="12700">
+            <a:solidFill>
+              <a:srgbClr val="B4C7D2"/>
+            </a:solidFill>
+          </a:ln>
+          <a:effectLst/>
+        </p:spPr>
+      </p:cxnSp>
+      <p:cxnSp>
+        <p:nvCxnSpPr>
+          <p:cNvPr id="27" name="C2-E13 line 25" descr="sci-ppt:o025"/>
+          <p:cNvCxnSpPr/>
+          <p:nvPr/>
+        </p:nvCxnSpPr>
+        <p:spPr>
+          <a:xfrm>
+            <a:off x="7498079" y="1371600"/>
+            <a:ext cx="0" cy="3657600"/>
+          </a:xfrm>
+          <a:prstGeom prst="line">
+            <a:avLst/>
+          </a:prstGeom>
+          <a:ln w="7620">
+            <a:solidFill>
+              <a:srgbClr val="2E4756"/>
+            </a:solidFill>
+          </a:ln>
+          <a:effectLst/>
+        </p:spPr>
+      </p:cxnSp>
+      <p:sp>
+        <p:nvSpPr>
+          <p:cNvPr id="28" name="C2-E13 text 26" descr="sci-ppt:o026"/>
+          <p:cNvSpPr txBox="1"/>
+          <p:nvPr/>
+        </p:nvSpPr>
+        <p:spPr>
+          <a:xfrm>
+            <a:off x="7040879" y="5111496"/>
+            <a:ext cx="914400" cy="208407"/>
+          </a:xfrm>
+          <a:prstGeom prst="rect">
+            <a:avLst/>
+          </a:prstGeom>
+          <a:noFill/>
+          <a:effectLst/>
+        </p:spPr>
+        <p:txBody>
+          <a:bodyPr wrap="none" lIns="18288" rIns="18288" tIns="18288" bIns="18288" anchor="t">
+            <a:spAutoFit/>
+          </a:bodyPr>
+          <a:lstStyle/>
+          <a:p>
+            <a:pPr algn="ctr">
+              <a:spcAft>
+                <a:spcPts val="0"/>
+              </a:spcAft>
+            </a:pPr>
+            <a:r>
+              <a:rPr sz="1050" b="0" i="0">
+                <a:solidFill>
+                  <a:srgbClr val="B4C7D2"/>
+                </a:solidFill>
+                <a:latin typeface="Arial"/>
+              </a:rPr>
+              <a:t>340</a:t>
+            </a:r>
+          </a:p>
+        </p:txBody>
+      </p:sp>
+      <p:cxnSp>
+        <p:nvCxnSpPr>
+          <p:cNvPr id="29" name="C2-E13 line 27" descr="sci-ppt:o027"/>
+          <p:cNvCxnSpPr/>
+          <p:nvPr/>
+        </p:nvCxnSpPr>
+        <p:spPr>
+          <a:xfrm>
+            <a:off x="850392" y="4559213"/>
+            <a:ext cx="64008" cy="0"/>
+          </a:xfrm>
+          <a:prstGeom prst="line">
+            <a:avLst/>
+          </a:prstGeom>
+          <a:ln w="12700">
+            <a:solidFill>
+              <a:srgbClr val="B4C7D2"/>
+            </a:solidFill>
+          </a:ln>
+          <a:effectLst/>
+        </p:spPr>
+      </p:cxnSp>
+      <p:cxnSp>
+        <p:nvCxnSpPr>
+          <p:cNvPr id="30" name="C2-E13 line 28" descr="sci-ppt:o028"/>
+          <p:cNvCxnSpPr/>
+          <p:nvPr/>
+        </p:nvCxnSpPr>
+        <p:spPr>
+          <a:xfrm>
+            <a:off x="914400" y="4559213"/>
+            <a:ext cx="6583679" cy="0"/>
+          </a:xfrm>
+          <a:prstGeom prst="line">
+            <a:avLst/>
+          </a:prstGeom>
+          <a:ln w="7620">
+            <a:solidFill>
+              <a:srgbClr val="2E4756"/>
+            </a:solidFill>
+          </a:ln>
+          <a:effectLst/>
+        </p:spPr>
+      </p:cxnSp>
+      <p:sp>
+        <p:nvSpPr>
+          <p:cNvPr id="31" name="C2-E13 text 29" descr="sci-ppt:o029"/>
+          <p:cNvSpPr txBox="1"/>
+          <p:nvPr/>
+        </p:nvSpPr>
+        <p:spPr>
+          <a:xfrm>
+            <a:off x="45720" y="4476917"/>
+            <a:ext cx="777240" cy="208407"/>
+          </a:xfrm>
+          <a:prstGeom prst="rect">
+            <a:avLst/>
+          </a:prstGeom>
+          <a:noFill/>
+          <a:effectLst/>
+        </p:spPr>
+        <p:txBody>
+          <a:bodyPr wrap="none" lIns="18288" rIns="18288" tIns="18288" bIns="18288" anchor="t">
+            <a:spAutoFit/>
+          </a:bodyPr>
+          <a:lstStyle/>
+          <a:p>
+            <a:pPr algn="r">
+              <a:spcAft>
+                <a:spcPts val="0"/>
+              </a:spcAft>
+            </a:pPr>
+            <a:r>
+              <a:rPr sz="1050" b="0" i="0">
+                <a:solidFill>
+                  <a:srgbClr val="B4C7D2"/>
+                </a:solidFill>
+                <a:latin typeface="Arial"/>
+              </a:rPr>
+              <a:t>0.01</a:t>
+            </a:r>
+          </a:p>
+        </p:txBody>
+      </p:sp>
+      <p:cxnSp>
+        <p:nvCxnSpPr>
+          <p:cNvPr id="32" name="C2-E13 line 30" descr="sci-ppt:o030"/>
+          <p:cNvCxnSpPr/>
+          <p:nvPr/>
+        </p:nvCxnSpPr>
+        <p:spPr>
+          <a:xfrm>
+            <a:off x="850392" y="3378165"/>
+            <a:ext cx="64008" cy="0"/>
+          </a:xfrm>
+          <a:prstGeom prst="line">
+            <a:avLst/>
+          </a:prstGeom>
+          <a:ln w="12700">
+            <a:solidFill>
+              <a:srgbClr val="B4C7D2"/>
+            </a:solidFill>
+          </a:ln>
+          <a:effectLst/>
+        </p:spPr>
+      </p:cxnSp>
+      <p:cxnSp>
+        <p:nvCxnSpPr>
+          <p:cNvPr id="33" name="C2-E13 line 31" descr="sci-ppt:o031"/>
+          <p:cNvCxnSpPr/>
+          <p:nvPr/>
+        </p:nvCxnSpPr>
+        <p:spPr>
+          <a:xfrm>
+            <a:off x="914400" y="3378165"/>
+            <a:ext cx="6583679" cy="0"/>
+          </a:xfrm>
+          <a:prstGeom prst="line">
+            <a:avLst/>
+          </a:prstGeom>
+          <a:ln w="7620">
+            <a:solidFill>
+              <a:srgbClr val="2E4756"/>
+            </a:solidFill>
+          </a:ln>
+          <a:effectLst/>
+        </p:spPr>
+      </p:cxnSp>
+      <p:sp>
+        <p:nvSpPr>
+          <p:cNvPr id="34" name="C2-E13 text 32" descr="sci-ppt:o032"/>
+          <p:cNvSpPr txBox="1"/>
+          <p:nvPr/>
+        </p:nvSpPr>
+        <p:spPr>
+          <a:xfrm>
+            <a:off x="45720" y="3295869"/>
+            <a:ext cx="777240" cy="208407"/>
+          </a:xfrm>
+          <a:prstGeom prst="rect">
+            <a:avLst/>
+          </a:prstGeom>
+          <a:noFill/>
+          <a:effectLst/>
+        </p:spPr>
+        <p:txBody>
+          <a:bodyPr wrap="none" lIns="18288" rIns="18288" tIns="18288" bIns="18288" anchor="t">
+            <a:spAutoFit/>
+          </a:bodyPr>
+          <a:lstStyle/>
+          <a:p>
+            <a:pPr algn="r">
+              <a:spcAft>
+                <a:spcPts val="0"/>
+              </a:spcAft>
+            </a:pPr>
+            <a:r>
+              <a:rPr sz="1050" b="0" i="0">
+                <a:solidFill>
+                  <a:srgbClr val="B4C7D2"/>
+                </a:solidFill>
+                <a:latin typeface="Arial"/>
+              </a:rPr>
+              <a:t>0.1</a:t>
+            </a:r>
+          </a:p>
+        </p:txBody>
+      </p:sp>
+      <p:cxnSp>
+        <p:nvCxnSpPr>
+          <p:cNvPr id="35" name="C2-E13 line 33" descr="sci-ppt:o033"/>
+          <p:cNvCxnSpPr/>
+          <p:nvPr/>
+        </p:nvCxnSpPr>
+        <p:spPr>
+          <a:xfrm>
+            <a:off x="850392" y="2197117"/>
+            <a:ext cx="64008" cy="0"/>
+          </a:xfrm>
+          <a:prstGeom prst="line">
+            <a:avLst/>
+          </a:prstGeom>
+          <a:ln w="12700">
+            <a:solidFill>
+              <a:srgbClr val="B4C7D2"/>
+            </a:solidFill>
+          </a:ln>
+          <a:effectLst/>
+        </p:spPr>
+      </p:cxnSp>
+      <p:cxnSp>
+        <p:nvCxnSpPr>
+          <p:cNvPr id="36" name="C2-E13 line 34" descr="sci-ppt:o034"/>
+          <p:cNvCxnSpPr/>
+          <p:nvPr/>
+        </p:nvCxnSpPr>
+        <p:spPr>
+          <a:xfrm>
+            <a:off x="914400" y="2197117"/>
+            <a:ext cx="6583679" cy="0"/>
+          </a:xfrm>
+          <a:prstGeom prst="line">
+            <a:avLst/>
+          </a:prstGeom>
+          <a:ln w="7620">
+            <a:solidFill>
+              <a:srgbClr val="2E4756"/>
+            </a:solidFill>
+          </a:ln>
+          <a:effectLst/>
+        </p:spPr>
+      </p:cxnSp>
+      <p:sp>
+        <p:nvSpPr>
+          <p:cNvPr id="37" name="C2-E13 text 35" descr="sci-ppt:o035"/>
+          <p:cNvSpPr txBox="1"/>
+          <p:nvPr/>
+        </p:nvSpPr>
+        <p:spPr>
+          <a:xfrm>
+            <a:off x="45720" y="2114821"/>
+            <a:ext cx="777240" cy="208407"/>
+          </a:xfrm>
+          <a:prstGeom prst="rect">
+            <a:avLst/>
+          </a:prstGeom>
+          <a:noFill/>
+          <a:effectLst/>
+        </p:spPr>
+        <p:txBody>
+          <a:bodyPr wrap="none" lIns="18288" rIns="18288" tIns="18288" bIns="18288" anchor="t">
+            <a:spAutoFit/>
+          </a:bodyPr>
+          <a:lstStyle/>
+          <a:p>
+            <a:pPr algn="r">
+              <a:spcAft>
+                <a:spcPts val="0"/>
+              </a:spcAft>
+            </a:pPr>
+            <a:r>
+              <a:rPr sz="1050" b="0" i="0">
+                <a:solidFill>
+                  <a:srgbClr val="B4C7D2"/>
+                </a:solidFill>
+                <a:latin typeface="Arial"/>
+              </a:rPr>
+              <a:t>1</a:t>
+            </a:r>
+          </a:p>
+        </p:txBody>
+      </p:sp>
+      <p:sp>
+        <p:nvSpPr>
+          <p:cNvPr id="38" name="C2-E13 text 36" descr="sci-ppt:o036"/>
+          <p:cNvSpPr txBox="1"/>
+          <p:nvPr/>
+        </p:nvSpPr>
+        <p:spPr>
+          <a:xfrm>
+            <a:off x="914400" y="5312664"/>
+            <a:ext cx="6583680" cy="231648"/>
+          </a:xfrm>
+          <a:prstGeom prst="rect">
+            <a:avLst/>
+          </a:prstGeom>
+          <a:noFill/>
+          <a:effectLst/>
+        </p:spPr>
+        <p:txBody>
+          <a:bodyPr wrap="none" lIns="18288" rIns="18288" tIns="18288" bIns="18288" anchor="t">
+            <a:spAutoFit/>
+          </a:bodyPr>
+          <a:lstStyle/>
+          <a:p>
+            <a:pPr algn="ctr">
+              <a:spcAft>
+                <a:spcPts val="0"/>
+              </a:spcAft>
+            </a:pPr>
+            <a:r>
+              <a:rPr sz="1200" b="0" i="0">
+                <a:solidFill>
+                  <a:srgbClr val="E7F0F3"/>
+                </a:solidFill>
+                <a:latin typeface="Arial"/>
+              </a:rPr>
+              <a:t>temperature T  (K)</a:t>
+            </a:r>
+          </a:p>
+        </p:txBody>
+      </p:sp>
+      <p:sp>
+        <p:nvSpPr>
+          <p:cNvPr id="39" name="C2-E13 text 37" descr="sci-ppt:o037"/>
+          <p:cNvSpPr txBox="1"/>
+          <p:nvPr/>
+        </p:nvSpPr>
+        <p:spPr>
+          <a:xfrm>
+            <a:off x="365760" y="1024128"/>
+            <a:ext cx="6583680" cy="231648"/>
+          </a:xfrm>
+          <a:prstGeom prst="rect">
+            <a:avLst/>
+          </a:prstGeom>
+          <a:noFill/>
+          <a:effectLst/>
+        </p:spPr>
+        <p:txBody>
+          <a:bodyPr wrap="none" lIns="18288" rIns="18288" tIns="18288" bIns="18288" anchor="t">
             <a:spAutoFit/>
           </a:bodyPr>
           <a:lstStyle/>
@@ -3197,75 +4173,1077 @@
               </a:spcAft>
             </a:pPr>
             <a:r>
-              <a:rPr sz="1728" b="0" i="0">
+              <a:rPr sz="1200" b="0" i="0">
                 <a:solidFill>
                   <a:srgbClr val="E7F0F3"/>
                 </a:solidFill>
                 <a:latin typeface="Arial"/>
               </a:rPr>
-              <a:t>Liquid | vapor equilibrium</a:t>
-            </a:r>
-          </a:p>
-        </p:txBody>
-      </p:sp>
-      <p:cxnSp>
-        <p:nvCxnSpPr>
-          <p:cNvPr id="5" name="arrow4" descr="sci-ppt:C2-E13-004"/>
-          <p:cNvCxnSpPr/>
+              <a:t>pₛₐₜ  (bar)</a:t>
+            </a:r>
+          </a:p>
+        </p:txBody>
+      </p:sp>
+      <p:sp>
+        <p:nvSpPr>
+          <p:cNvPr id="40" name="C2-E13 polygon 38" descr="sci-ppt:o038"/>
+          <p:cNvSpPr/>
           <p:nvPr/>
-        </p:nvCxnSpPr>
-        <p:spPr>
-          <a:xfrm>
-            <a:off x="6339840" y="3962399"/>
-            <a:ext cx="4450080" cy="0"/>
-          </a:xfrm>
-          <a:prstGeom prst="line">
-            <a:avLst/>
-          </a:prstGeom>
-          <a:ln w="25400">
+        </p:nvSpPr>
+        <p:spPr>
+          <a:xfrm>
+            <a:off x="1196557" y="3822228"/>
+            <a:ext cx="2821577" cy="995434"/>
+          </a:xfrm>
+          <a:custGeom>
+            <a:avLst/>
+            <a:gdLst/>
+            <a:ahLst/>
+            <a:cxnLst/>
+            <a:rect l="l" t="t" r="r" b="b"/>
+            <a:pathLst>
+              <a:path w="2821577" h="995434">
+                <a:moveTo>
+                  <a:pt x="0" y="995434"/>
+                </a:moveTo>
+                <a:lnTo>
+                  <a:pt x="28501" y="984143"/>
+                </a:lnTo>
+                <a:lnTo>
+                  <a:pt x="57002" y="972880"/>
+                </a:lnTo>
+                <a:lnTo>
+                  <a:pt x="85503" y="961646"/>
+                </a:lnTo>
+                <a:lnTo>
+                  <a:pt x="114003" y="950439"/>
+                </a:lnTo>
+                <a:lnTo>
+                  <a:pt x="142504" y="939261"/>
+                </a:lnTo>
+                <a:lnTo>
+                  <a:pt x="171005" y="928110"/>
+                </a:lnTo>
+                <a:lnTo>
+                  <a:pt x="199506" y="916988"/>
+                </a:lnTo>
+                <a:lnTo>
+                  <a:pt x="228006" y="905892"/>
+                </a:lnTo>
+                <a:lnTo>
+                  <a:pt x="256507" y="894825"/>
+                </a:lnTo>
+                <a:lnTo>
+                  <a:pt x="285008" y="883785"/>
+                </a:lnTo>
+                <a:lnTo>
+                  <a:pt x="313509" y="872772"/>
+                </a:lnTo>
+                <a:lnTo>
+                  <a:pt x="342010" y="861786"/>
+                </a:lnTo>
+                <a:lnTo>
+                  <a:pt x="370510" y="850828"/>
+                </a:lnTo>
+                <a:lnTo>
+                  <a:pt x="399011" y="839897"/>
+                </a:lnTo>
+                <a:lnTo>
+                  <a:pt x="427512" y="828992"/>
+                </a:lnTo>
+                <a:lnTo>
+                  <a:pt x="456013" y="818115"/>
+                </a:lnTo>
+                <a:lnTo>
+                  <a:pt x="484513" y="807264"/>
+                </a:lnTo>
+                <a:lnTo>
+                  <a:pt x="513014" y="796440"/>
+                </a:lnTo>
+                <a:lnTo>
+                  <a:pt x="541515" y="785642"/>
+                </a:lnTo>
+                <a:lnTo>
+                  <a:pt x="570016" y="774871"/>
+                </a:lnTo>
+                <a:lnTo>
+                  <a:pt x="598517" y="764126"/>
+                </a:lnTo>
+                <a:lnTo>
+                  <a:pt x="627017" y="753408"/>
+                </a:lnTo>
+                <a:lnTo>
+                  <a:pt x="655518" y="742716"/>
+                </a:lnTo>
+                <a:lnTo>
+                  <a:pt x="684019" y="732049"/>
+                </a:lnTo>
+                <a:lnTo>
+                  <a:pt x="712520" y="721409"/>
+                </a:lnTo>
+                <a:lnTo>
+                  <a:pt x="741020" y="710795"/>
+                </a:lnTo>
+                <a:lnTo>
+                  <a:pt x="769521" y="700206"/>
+                </a:lnTo>
+                <a:lnTo>
+                  <a:pt x="798022" y="689643"/>
+                </a:lnTo>
+                <a:lnTo>
+                  <a:pt x="826523" y="679106"/>
+                </a:lnTo>
+                <a:lnTo>
+                  <a:pt x="855024" y="668594"/>
+                </a:lnTo>
+                <a:lnTo>
+                  <a:pt x="883524" y="658108"/>
+                </a:lnTo>
+                <a:lnTo>
+                  <a:pt x="912025" y="647647"/>
+                </a:lnTo>
+                <a:lnTo>
+                  <a:pt x="940526" y="637211"/>
+                </a:lnTo>
+                <a:lnTo>
+                  <a:pt x="969027" y="626801"/>
+                </a:lnTo>
+                <a:lnTo>
+                  <a:pt x="997527" y="616415"/>
+                </a:lnTo>
+                <a:lnTo>
+                  <a:pt x="1026028" y="606054"/>
+                </a:lnTo>
+                <a:lnTo>
+                  <a:pt x="1054529" y="595719"/>
+                </a:lnTo>
+                <a:lnTo>
+                  <a:pt x="1083030" y="585408"/>
+                </a:lnTo>
+                <a:lnTo>
+                  <a:pt x="1111531" y="575121"/>
+                </a:lnTo>
+                <a:lnTo>
+                  <a:pt x="1140031" y="564860"/>
+                </a:lnTo>
+                <a:lnTo>
+                  <a:pt x="1168532" y="554622"/>
+                </a:lnTo>
+                <a:lnTo>
+                  <a:pt x="1197033" y="544410"/>
+                </a:lnTo>
+                <a:lnTo>
+                  <a:pt x="1225534" y="534221"/>
+                </a:lnTo>
+                <a:lnTo>
+                  <a:pt x="1254034" y="524057"/>
+                </a:lnTo>
+                <a:lnTo>
+                  <a:pt x="1282535" y="513917"/>
+                </a:lnTo>
+                <a:lnTo>
+                  <a:pt x="1311036" y="503801"/>
+                </a:lnTo>
+                <a:lnTo>
+                  <a:pt x="1339537" y="493709"/>
+                </a:lnTo>
+                <a:lnTo>
+                  <a:pt x="1368038" y="483641"/>
+                </a:lnTo>
+                <a:lnTo>
+                  <a:pt x="1396538" y="473597"/>
+                </a:lnTo>
+                <a:lnTo>
+                  <a:pt x="1425039" y="463577"/>
+                </a:lnTo>
+                <a:lnTo>
+                  <a:pt x="1453540" y="453580"/>
+                </a:lnTo>
+                <a:lnTo>
+                  <a:pt x="1482041" y="443607"/>
+                </a:lnTo>
+                <a:lnTo>
+                  <a:pt x="1510542" y="433657"/>
+                </a:lnTo>
+                <a:lnTo>
+                  <a:pt x="1539042" y="423730"/>
+                </a:lnTo>
+                <a:lnTo>
+                  <a:pt x="1567543" y="413827"/>
+                </a:lnTo>
+                <a:lnTo>
+                  <a:pt x="1596044" y="403948"/>
+                </a:lnTo>
+                <a:lnTo>
+                  <a:pt x="1624545" y="394091"/>
+                </a:lnTo>
+                <a:lnTo>
+                  <a:pt x="1653045" y="384258"/>
+                </a:lnTo>
+                <a:lnTo>
+                  <a:pt x="1681546" y="374447"/>
+                </a:lnTo>
+                <a:lnTo>
+                  <a:pt x="1710047" y="364660"/>
+                </a:lnTo>
+                <a:lnTo>
+                  <a:pt x="1738548" y="354895"/>
+                </a:lnTo>
+                <a:lnTo>
+                  <a:pt x="1767049" y="345153"/>
+                </a:lnTo>
+                <a:lnTo>
+                  <a:pt x="1795549" y="335433"/>
+                </a:lnTo>
+                <a:lnTo>
+                  <a:pt x="1824050" y="325737"/>
+                </a:lnTo>
+                <a:lnTo>
+                  <a:pt x="1852551" y="316062"/>
+                </a:lnTo>
+                <a:lnTo>
+                  <a:pt x="1881052" y="306411"/>
+                </a:lnTo>
+                <a:lnTo>
+                  <a:pt x="1909552" y="296781"/>
+                </a:lnTo>
+                <a:lnTo>
+                  <a:pt x="1938053" y="287174"/>
+                </a:lnTo>
+                <a:lnTo>
+                  <a:pt x="1966554" y="277589"/>
+                </a:lnTo>
+                <a:lnTo>
+                  <a:pt x="1995055" y="268026"/>
+                </a:lnTo>
+                <a:lnTo>
+                  <a:pt x="2023556" y="258486"/>
+                </a:lnTo>
+                <a:lnTo>
+                  <a:pt x="2052056" y="248967"/>
+                </a:lnTo>
+                <a:lnTo>
+                  <a:pt x="2080557" y="239470"/>
+                </a:lnTo>
+                <a:lnTo>
+                  <a:pt x="2109058" y="229995"/>
+                </a:lnTo>
+                <a:lnTo>
+                  <a:pt x="2137559" y="220542"/>
+                </a:lnTo>
+                <a:lnTo>
+                  <a:pt x="2166059" y="211110"/>
+                </a:lnTo>
+                <a:lnTo>
+                  <a:pt x="2194560" y="201700"/>
+                </a:lnTo>
+                <a:lnTo>
+                  <a:pt x="2223061" y="192312"/>
+                </a:lnTo>
+                <a:lnTo>
+                  <a:pt x="2251562" y="182945"/>
+                </a:lnTo>
+                <a:lnTo>
+                  <a:pt x="2280063" y="173599"/>
+                </a:lnTo>
+                <a:lnTo>
+                  <a:pt x="2308563" y="164275"/>
+                </a:lnTo>
+                <a:lnTo>
+                  <a:pt x="2337064" y="154972"/>
+                </a:lnTo>
+                <a:lnTo>
+                  <a:pt x="2365565" y="145690"/>
+                </a:lnTo>
+                <a:lnTo>
+                  <a:pt x="2394066" y="136429"/>
+                </a:lnTo>
+                <a:lnTo>
+                  <a:pt x="2422566" y="127189"/>
+                </a:lnTo>
+                <a:lnTo>
+                  <a:pt x="2451067" y="117971"/>
+                </a:lnTo>
+                <a:lnTo>
+                  <a:pt x="2479568" y="108773"/>
+                </a:lnTo>
+                <a:lnTo>
+                  <a:pt x="2508069" y="99595"/>
+                </a:lnTo>
+                <a:lnTo>
+                  <a:pt x="2536570" y="90439"/>
+                </a:lnTo>
+                <a:lnTo>
+                  <a:pt x="2565070" y="81303"/>
+                </a:lnTo>
+                <a:lnTo>
+                  <a:pt x="2593571" y="72188"/>
+                </a:lnTo>
+                <a:lnTo>
+                  <a:pt x="2622072" y="63093"/>
+                </a:lnTo>
+                <a:lnTo>
+                  <a:pt x="2650573" y="54019"/>
+                </a:lnTo>
+                <a:lnTo>
+                  <a:pt x="2679073" y="44965"/>
+                </a:lnTo>
+                <a:lnTo>
+                  <a:pt x="2707574" y="35932"/>
+                </a:lnTo>
+                <a:lnTo>
+                  <a:pt x="2736075" y="26919"/>
+                </a:lnTo>
+                <a:lnTo>
+                  <a:pt x="2764576" y="17926"/>
+                </a:lnTo>
+                <a:lnTo>
+                  <a:pt x="2793077" y="8953"/>
+                </a:lnTo>
+                <a:lnTo>
+                  <a:pt x="2821577" y="0"/>
+                </a:lnTo>
+              </a:path>
+            </a:pathLst>
+          </a:custGeom>
+          <a:noFill/>
+          <a:ln w="38100">
+            <a:solidFill>
+              <a:srgbClr val="7FC8F8"/>
+            </a:solidFill>
+          </a:ln>
+          <a:effectLst/>
+        </p:spPr>
+        <p:txBody>
+          <a:bodyPr rtlCol="0" anchor="ctr"/>
+          <a:lstStyle/>
+          <a:p>
+            <a:pPr algn="ctr"/>
+          </a:p>
+        </p:txBody>
+      </p:sp>
+      <p:sp>
+        <p:nvSpPr>
+          <p:cNvPr id="41" name="C2-E13 polygon 39" descr="sci-ppt:o039"/>
+          <p:cNvSpPr/>
+          <p:nvPr/>
+        </p:nvSpPr>
+        <p:spPr>
+          <a:xfrm>
+            <a:off x="4112187" y="3028058"/>
+            <a:ext cx="2727525" cy="764920"/>
+          </a:xfrm>
+          <a:custGeom>
+            <a:avLst/>
+            <a:gdLst/>
+            <a:ahLst/>
+            <a:cxnLst/>
+            <a:rect l="l" t="t" r="r" b="b"/>
+            <a:pathLst>
+              <a:path w="2727525" h="764920">
+                <a:moveTo>
+                  <a:pt x="0" y="764920"/>
+                </a:moveTo>
+                <a:lnTo>
+                  <a:pt x="27551" y="756355"/>
+                </a:lnTo>
+                <a:lnTo>
+                  <a:pt x="55101" y="747810"/>
+                </a:lnTo>
+                <a:lnTo>
+                  <a:pt x="82652" y="739284"/>
+                </a:lnTo>
+                <a:lnTo>
+                  <a:pt x="110203" y="730777"/>
+                </a:lnTo>
+                <a:lnTo>
+                  <a:pt x="137754" y="722288"/>
+                </a:lnTo>
+                <a:lnTo>
+                  <a:pt x="165304" y="713818"/>
+                </a:lnTo>
+                <a:lnTo>
+                  <a:pt x="192855" y="705366"/>
+                </a:lnTo>
+                <a:lnTo>
+                  <a:pt x="220406" y="696933"/>
+                </a:lnTo>
+                <a:lnTo>
+                  <a:pt x="247957" y="688519"/>
+                </a:lnTo>
+                <a:lnTo>
+                  <a:pt x="275507" y="680123"/>
+                </a:lnTo>
+                <a:lnTo>
+                  <a:pt x="303058" y="671746"/>
+                </a:lnTo>
+                <a:lnTo>
+                  <a:pt x="330609" y="663386"/>
+                </a:lnTo>
+                <a:lnTo>
+                  <a:pt x="358160" y="655045"/>
+                </a:lnTo>
+                <a:lnTo>
+                  <a:pt x="385710" y="646722"/>
+                </a:lnTo>
+                <a:lnTo>
+                  <a:pt x="413261" y="638418"/>
+                </a:lnTo>
+                <a:lnTo>
+                  <a:pt x="440812" y="630131"/>
+                </a:lnTo>
+                <a:lnTo>
+                  <a:pt x="468363" y="621862"/>
+                </a:lnTo>
+                <a:lnTo>
+                  <a:pt x="495913" y="613612"/>
+                </a:lnTo>
+                <a:lnTo>
+                  <a:pt x="523464" y="605379"/>
+                </a:lnTo>
+                <a:lnTo>
+                  <a:pt x="551015" y="597164"/>
+                </a:lnTo>
+                <a:lnTo>
+                  <a:pt x="578566" y="588967"/>
+                </a:lnTo>
+                <a:lnTo>
+                  <a:pt x="606117" y="580788"/>
+                </a:lnTo>
+                <a:lnTo>
+                  <a:pt x="633667" y="572626"/>
+                </a:lnTo>
+                <a:lnTo>
+                  <a:pt x="661218" y="564482"/>
+                </a:lnTo>
+                <a:lnTo>
+                  <a:pt x="688769" y="556355"/>
+                </a:lnTo>
+                <a:lnTo>
+                  <a:pt x="716320" y="548246"/>
+                </a:lnTo>
+                <a:lnTo>
+                  <a:pt x="743870" y="540154"/>
+                </a:lnTo>
+                <a:lnTo>
+                  <a:pt x="771421" y="532080"/>
+                </a:lnTo>
+                <a:lnTo>
+                  <a:pt x="798972" y="524023"/>
+                </a:lnTo>
+                <a:lnTo>
+                  <a:pt x="826523" y="515984"/>
+                </a:lnTo>
+                <a:lnTo>
+                  <a:pt x="854073" y="507961"/>
+                </a:lnTo>
+                <a:lnTo>
+                  <a:pt x="881624" y="499956"/>
+                </a:lnTo>
+                <a:lnTo>
+                  <a:pt x="909175" y="491968"/>
+                </a:lnTo>
+                <a:lnTo>
+                  <a:pt x="936726" y="483996"/>
+                </a:lnTo>
+                <a:lnTo>
+                  <a:pt x="964276" y="476042"/>
+                </a:lnTo>
+                <a:lnTo>
+                  <a:pt x="991827" y="468105"/>
+                </a:lnTo>
+                <a:lnTo>
+                  <a:pt x="1019378" y="460185"/>
+                </a:lnTo>
+                <a:lnTo>
+                  <a:pt x="1046929" y="452281"/>
+                </a:lnTo>
+                <a:lnTo>
+                  <a:pt x="1074479" y="444395"/>
+                </a:lnTo>
+                <a:lnTo>
+                  <a:pt x="1102030" y="436525"/>
+                </a:lnTo>
+                <a:lnTo>
+                  <a:pt x="1129581" y="428671"/>
+                </a:lnTo>
+                <a:lnTo>
+                  <a:pt x="1157132" y="420835"/>
+                </a:lnTo>
+                <a:lnTo>
+                  <a:pt x="1184682" y="413015"/>
+                </a:lnTo>
+                <a:lnTo>
+                  <a:pt x="1212233" y="405211"/>
+                </a:lnTo>
+                <a:lnTo>
+                  <a:pt x="1239784" y="397424"/>
+                </a:lnTo>
+                <a:lnTo>
+                  <a:pt x="1267335" y="389653"/>
+                </a:lnTo>
+                <a:lnTo>
+                  <a:pt x="1294885" y="381899"/>
+                </a:lnTo>
+                <a:lnTo>
+                  <a:pt x="1322436" y="374161"/>
+                </a:lnTo>
+                <a:lnTo>
+                  <a:pt x="1349987" y="366439"/>
+                </a:lnTo>
+                <a:lnTo>
+                  <a:pt x="1377538" y="358733"/>
+                </a:lnTo>
+                <a:lnTo>
+                  <a:pt x="1405088" y="351044"/>
+                </a:lnTo>
+                <a:lnTo>
+                  <a:pt x="1432639" y="343371"/>
+                </a:lnTo>
+                <a:lnTo>
+                  <a:pt x="1460190" y="335713"/>
+                </a:lnTo>
+                <a:lnTo>
+                  <a:pt x="1487741" y="328072"/>
+                </a:lnTo>
+                <a:lnTo>
+                  <a:pt x="1515291" y="320447"/>
+                </a:lnTo>
+                <a:lnTo>
+                  <a:pt x="1542842" y="312837"/>
+                </a:lnTo>
+                <a:lnTo>
+                  <a:pt x="1570393" y="305244"/>
+                </a:lnTo>
+                <a:lnTo>
+                  <a:pt x="1597944" y="297666"/>
+                </a:lnTo>
+                <a:lnTo>
+                  <a:pt x="1625494" y="290104"/>
+                </a:lnTo>
+                <a:lnTo>
+                  <a:pt x="1653045" y="282558"/>
+                </a:lnTo>
+                <a:lnTo>
+                  <a:pt x="1680596" y="275027"/>
+                </a:lnTo>
+                <a:lnTo>
+                  <a:pt x="1708147" y="267512"/>
+                </a:lnTo>
+                <a:lnTo>
+                  <a:pt x="1735697" y="260012"/>
+                </a:lnTo>
+                <a:lnTo>
+                  <a:pt x="1763248" y="252528"/>
+                </a:lnTo>
+                <a:lnTo>
+                  <a:pt x="1790799" y="245060"/>
+                </a:lnTo>
+                <a:lnTo>
+                  <a:pt x="1818350" y="237607"/>
+                </a:lnTo>
+                <a:lnTo>
+                  <a:pt x="1845900" y="230169"/>
+                </a:lnTo>
+                <a:lnTo>
+                  <a:pt x="1873451" y="222747"/>
+                </a:lnTo>
+                <a:lnTo>
+                  <a:pt x="1901002" y="215340"/>
+                </a:lnTo>
+                <a:lnTo>
+                  <a:pt x="1928553" y="207948"/>
+                </a:lnTo>
+                <a:lnTo>
+                  <a:pt x="1956103" y="200571"/>
+                </a:lnTo>
+                <a:lnTo>
+                  <a:pt x="1983654" y="193209"/>
+                </a:lnTo>
+                <a:lnTo>
+                  <a:pt x="2011205" y="185863"/>
+                </a:lnTo>
+                <a:lnTo>
+                  <a:pt x="2038756" y="178531"/>
+                </a:lnTo>
+                <a:lnTo>
+                  <a:pt x="2066306" y="171215"/>
+                </a:lnTo>
+                <a:lnTo>
+                  <a:pt x="2093857" y="163913"/>
+                </a:lnTo>
+                <a:lnTo>
+                  <a:pt x="2121408" y="156627"/>
+                </a:lnTo>
+                <a:lnTo>
+                  <a:pt x="2148959" y="149355"/>
+                </a:lnTo>
+                <a:lnTo>
+                  <a:pt x="2176509" y="142098"/>
+                </a:lnTo>
+                <a:lnTo>
+                  <a:pt x="2204060" y="134856"/>
+                </a:lnTo>
+                <a:lnTo>
+                  <a:pt x="2231611" y="127628"/>
+                </a:lnTo>
+                <a:lnTo>
+                  <a:pt x="2259162" y="120415"/>
+                </a:lnTo>
+                <a:lnTo>
+                  <a:pt x="2286712" y="113217"/>
+                </a:lnTo>
+                <a:lnTo>
+                  <a:pt x="2314263" y="106034"/>
+                </a:lnTo>
+                <a:lnTo>
+                  <a:pt x="2341814" y="98865"/>
+                </a:lnTo>
+                <a:lnTo>
+                  <a:pt x="2369365" y="91710"/>
+                </a:lnTo>
+                <a:lnTo>
+                  <a:pt x="2396915" y="84570"/>
+                </a:lnTo>
+                <a:lnTo>
+                  <a:pt x="2424466" y="77444"/>
+                </a:lnTo>
+                <a:lnTo>
+                  <a:pt x="2452017" y="70333"/>
+                </a:lnTo>
+                <a:lnTo>
+                  <a:pt x="2479568" y="63236"/>
+                </a:lnTo>
+                <a:lnTo>
+                  <a:pt x="2507118" y="56153"/>
+                </a:lnTo>
+                <a:lnTo>
+                  <a:pt x="2534669" y="49085"/>
+                </a:lnTo>
+                <a:lnTo>
+                  <a:pt x="2562220" y="42030"/>
+                </a:lnTo>
+                <a:lnTo>
+                  <a:pt x="2589771" y="34990"/>
+                </a:lnTo>
+                <a:lnTo>
+                  <a:pt x="2617321" y="27964"/>
+                </a:lnTo>
+                <a:lnTo>
+                  <a:pt x="2644872" y="20952"/>
+                </a:lnTo>
+                <a:lnTo>
+                  <a:pt x="2672423" y="13954"/>
+                </a:lnTo>
+                <a:lnTo>
+                  <a:pt x="2699974" y="6970"/>
+                </a:lnTo>
+                <a:lnTo>
+                  <a:pt x="2727525" y="0"/>
+                </a:lnTo>
+              </a:path>
+            </a:pathLst>
+          </a:custGeom>
+          <a:noFill/>
+          <a:ln w="38100">
+            <a:solidFill>
+              <a:srgbClr val="7FC8F8"/>
+            </a:solidFill>
+          </a:ln>
+          <a:effectLst/>
+        </p:spPr>
+        <p:txBody>
+          <a:bodyPr rtlCol="0" anchor="ctr"/>
+          <a:lstStyle/>
+          <a:p>
+            <a:pPr algn="ctr"/>
+          </a:p>
+        </p:txBody>
+      </p:sp>
+      <p:sp>
+        <p:nvSpPr>
+          <p:cNvPr id="42" name="C2-E13 polygon 40" descr="sci-ppt:o040"/>
+          <p:cNvSpPr/>
+          <p:nvPr/>
+        </p:nvSpPr>
+        <p:spPr>
+          <a:xfrm>
+            <a:off x="2120153" y="1600043"/>
+            <a:ext cx="5184178" cy="991224"/>
+          </a:xfrm>
+          <a:custGeom>
+            <a:avLst/>
+            <a:gdLst/>
+            <a:ahLst/>
+            <a:cxnLst/>
+            <a:rect l="l" t="t" r="r" b="b"/>
+            <a:pathLst>
+              <a:path w="5184178" h="991224">
+                <a:moveTo>
+                  <a:pt x="0" y="991224"/>
+                </a:moveTo>
+                <a:lnTo>
+                  <a:pt x="52366" y="978969"/>
+                </a:lnTo>
+                <a:lnTo>
+                  <a:pt x="104731" y="966770"/>
+                </a:lnTo>
+                <a:lnTo>
+                  <a:pt x="157097" y="954626"/>
+                </a:lnTo>
+                <a:lnTo>
+                  <a:pt x="209462" y="942538"/>
+                </a:lnTo>
+                <a:lnTo>
+                  <a:pt x="261828" y="930504"/>
+                </a:lnTo>
+                <a:lnTo>
+                  <a:pt x="314193" y="918525"/>
+                </a:lnTo>
+                <a:lnTo>
+                  <a:pt x="366558" y="906600"/>
+                </a:lnTo>
+                <a:lnTo>
+                  <a:pt x="418924" y="894728"/>
+                </a:lnTo>
+                <a:lnTo>
+                  <a:pt x="471289" y="882910"/>
+                </a:lnTo>
+                <a:lnTo>
+                  <a:pt x="523655" y="871144"/>
+                </a:lnTo>
+                <a:lnTo>
+                  <a:pt x="576020" y="859431"/>
+                </a:lnTo>
+                <a:lnTo>
+                  <a:pt x="628386" y="847771"/>
+                </a:lnTo>
+                <a:lnTo>
+                  <a:pt x="680751" y="836162"/>
+                </a:lnTo>
+                <a:lnTo>
+                  <a:pt x="733117" y="824605"/>
+                </a:lnTo>
+                <a:lnTo>
+                  <a:pt x="785482" y="813099"/>
+                </a:lnTo>
+                <a:lnTo>
+                  <a:pt x="837847" y="801644"/>
+                </a:lnTo>
+                <a:lnTo>
+                  <a:pt x="890213" y="790239"/>
+                </a:lnTo>
+                <a:lnTo>
+                  <a:pt x="942578" y="778885"/>
+                </a:lnTo>
+                <a:lnTo>
+                  <a:pt x="994944" y="767580"/>
+                </a:lnTo>
+                <a:lnTo>
+                  <a:pt x="1047309" y="756325"/>
+                </a:lnTo>
+                <a:lnTo>
+                  <a:pt x="1099675" y="745120"/>
+                </a:lnTo>
+                <a:lnTo>
+                  <a:pt x="1152040" y="733963"/>
+                </a:lnTo>
+                <a:lnTo>
+                  <a:pt x="1204405" y="722854"/>
+                </a:lnTo>
+                <a:lnTo>
+                  <a:pt x="1256771" y="711794"/>
+                </a:lnTo>
+                <a:lnTo>
+                  <a:pt x="1309136" y="700782"/>
+                </a:lnTo>
+                <a:lnTo>
+                  <a:pt x="1361502" y="689817"/>
+                </a:lnTo>
+                <a:lnTo>
+                  <a:pt x="1413867" y="678900"/>
+                </a:lnTo>
+                <a:lnTo>
+                  <a:pt x="1466233" y="668029"/>
+                </a:lnTo>
+                <a:lnTo>
+                  <a:pt x="1518598" y="657206"/>
+                </a:lnTo>
+                <a:lnTo>
+                  <a:pt x="1570963" y="646429"/>
+                </a:lnTo>
+                <a:lnTo>
+                  <a:pt x="1623329" y="635698"/>
+                </a:lnTo>
+                <a:lnTo>
+                  <a:pt x="1675694" y="625012"/>
+                </a:lnTo>
+                <a:lnTo>
+                  <a:pt x="1728060" y="614372"/>
+                </a:lnTo>
+                <a:lnTo>
+                  <a:pt x="1780425" y="603778"/>
+                </a:lnTo>
+                <a:lnTo>
+                  <a:pt x="1832791" y="593228"/>
+                </a:lnTo>
+                <a:lnTo>
+                  <a:pt x="1885156" y="582723"/>
+                </a:lnTo>
+                <a:lnTo>
+                  <a:pt x="1937521" y="572263"/>
+                </a:lnTo>
+                <a:lnTo>
+                  <a:pt x="1989887" y="561846"/>
+                </a:lnTo>
+                <a:lnTo>
+                  <a:pt x="2042252" y="551473"/>
+                </a:lnTo>
+                <a:lnTo>
+                  <a:pt x="2094618" y="541144"/>
+                </a:lnTo>
+                <a:lnTo>
+                  <a:pt x="2146983" y="530858"/>
+                </a:lnTo>
+                <a:lnTo>
+                  <a:pt x="2199349" y="520615"/>
+                </a:lnTo>
+                <a:lnTo>
+                  <a:pt x="2251714" y="510415"/>
+                </a:lnTo>
+                <a:lnTo>
+                  <a:pt x="2304079" y="500257"/>
+                </a:lnTo>
+                <a:lnTo>
+                  <a:pt x="2356445" y="490142"/>
+                </a:lnTo>
+                <a:lnTo>
+                  <a:pt x="2408810" y="480068"/>
+                </a:lnTo>
+                <a:lnTo>
+                  <a:pt x="2461176" y="470036"/>
+                </a:lnTo>
+                <a:lnTo>
+                  <a:pt x="2513541" y="460046"/>
+                </a:lnTo>
+                <a:lnTo>
+                  <a:pt x="2565907" y="450096"/>
+                </a:lnTo>
+                <a:lnTo>
+                  <a:pt x="2618272" y="440188"/>
+                </a:lnTo>
+                <a:lnTo>
+                  <a:pt x="2670637" y="430320"/>
+                </a:lnTo>
+                <a:lnTo>
+                  <a:pt x="2723003" y="420492"/>
+                </a:lnTo>
+                <a:lnTo>
+                  <a:pt x="2775368" y="410705"/>
+                </a:lnTo>
+                <a:lnTo>
+                  <a:pt x="2827734" y="400958"/>
+                </a:lnTo>
+                <a:lnTo>
+                  <a:pt x="2880099" y="391250"/>
+                </a:lnTo>
+                <a:lnTo>
+                  <a:pt x="2932465" y="381582"/>
+                </a:lnTo>
+                <a:lnTo>
+                  <a:pt x="2984830" y="371952"/>
+                </a:lnTo>
+                <a:lnTo>
+                  <a:pt x="3037196" y="362362"/>
+                </a:lnTo>
+                <a:lnTo>
+                  <a:pt x="3089561" y="352811"/>
+                </a:lnTo>
+                <a:lnTo>
+                  <a:pt x="3141926" y="343298"/>
+                </a:lnTo>
+                <a:lnTo>
+                  <a:pt x="3194292" y="333823"/>
+                </a:lnTo>
+                <a:lnTo>
+                  <a:pt x="3246657" y="324386"/>
+                </a:lnTo>
+                <a:lnTo>
+                  <a:pt x="3299023" y="314987"/>
+                </a:lnTo>
+                <a:lnTo>
+                  <a:pt x="3351388" y="305626"/>
+                </a:lnTo>
+                <a:lnTo>
+                  <a:pt x="3403754" y="296301"/>
+                </a:lnTo>
+                <a:lnTo>
+                  <a:pt x="3456119" y="287014"/>
+                </a:lnTo>
+                <a:lnTo>
+                  <a:pt x="3508484" y="277764"/>
+                </a:lnTo>
+                <a:lnTo>
+                  <a:pt x="3560850" y="268551"/>
+                </a:lnTo>
+                <a:lnTo>
+                  <a:pt x="3613215" y="259374"/>
+                </a:lnTo>
+                <a:lnTo>
+                  <a:pt x="3665581" y="250233"/>
+                </a:lnTo>
+                <a:lnTo>
+                  <a:pt x="3717946" y="241128"/>
+                </a:lnTo>
+                <a:lnTo>
+                  <a:pt x="3770312" y="232059"/>
+                </a:lnTo>
+                <a:lnTo>
+                  <a:pt x="3822677" y="223026"/>
+                </a:lnTo>
+                <a:lnTo>
+                  <a:pt x="3875042" y="214028"/>
+                </a:lnTo>
+                <a:lnTo>
+                  <a:pt x="3927408" y="205065"/>
+                </a:lnTo>
+                <a:lnTo>
+                  <a:pt x="3979773" y="196138"/>
+                </a:lnTo>
+                <a:lnTo>
+                  <a:pt x="4032139" y="187244"/>
+                </a:lnTo>
+                <a:lnTo>
+                  <a:pt x="4084504" y="178386"/>
+                </a:lnTo>
+                <a:lnTo>
+                  <a:pt x="4136870" y="169562"/>
+                </a:lnTo>
+                <a:lnTo>
+                  <a:pt x="4189235" y="160772"/>
+                </a:lnTo>
+                <a:lnTo>
+                  <a:pt x="4241600" y="152016"/>
+                </a:lnTo>
+                <a:lnTo>
+                  <a:pt x="4293966" y="143294"/>
+                </a:lnTo>
+                <a:lnTo>
+                  <a:pt x="4346331" y="134605"/>
+                </a:lnTo>
+                <a:lnTo>
+                  <a:pt x="4398697" y="125950"/>
+                </a:lnTo>
+                <a:lnTo>
+                  <a:pt x="4451062" y="117328"/>
+                </a:lnTo>
+                <a:lnTo>
+                  <a:pt x="4503428" y="108739"/>
+                </a:lnTo>
+                <a:lnTo>
+                  <a:pt x="4555793" y="100183"/>
+                </a:lnTo>
+                <a:lnTo>
+                  <a:pt x="4608158" y="91659"/>
+                </a:lnTo>
+                <a:lnTo>
+                  <a:pt x="4660524" y="83168"/>
+                </a:lnTo>
+                <a:lnTo>
+                  <a:pt x="4712889" y="74709"/>
+                </a:lnTo>
+                <a:lnTo>
+                  <a:pt x="4765255" y="66282"/>
+                </a:lnTo>
+                <a:lnTo>
+                  <a:pt x="4817620" y="57887"/>
+                </a:lnTo>
+                <a:lnTo>
+                  <a:pt x="4869986" y="49524"/>
+                </a:lnTo>
+                <a:lnTo>
+                  <a:pt x="4922351" y="41192"/>
+                </a:lnTo>
+                <a:lnTo>
+                  <a:pt x="4974716" y="32892"/>
+                </a:lnTo>
+                <a:lnTo>
+                  <a:pt x="5027082" y="24623"/>
+                </a:lnTo>
+                <a:lnTo>
+                  <a:pt x="5079447" y="16384"/>
+                </a:lnTo>
+                <a:lnTo>
+                  <a:pt x="5131813" y="8177"/>
+                </a:lnTo>
+                <a:lnTo>
+                  <a:pt x="5184178" y="0"/>
+                </a:lnTo>
+              </a:path>
+            </a:pathLst>
+          </a:custGeom>
+          <a:noFill/>
+          <a:ln w="38100">
             <a:solidFill>
               <a:srgbClr val="8EDBD4"/>
             </a:solidFill>
-            <a:headEnd type="none" w="med" len="med"/>
-            <a:tailEnd type="triangle" w="med" len="med"/>
           </a:ln>
           <a:effectLst/>
         </p:spPr>
-      </p:cxnSp>
-      <p:cxnSp>
-        <p:nvCxnSpPr>
-          <p:cNvPr id="6" name="arrow5" descr="sci-ppt:C2-E13-005"/>
-          <p:cNvCxnSpPr/>
+        <p:txBody>
+          <a:bodyPr rtlCol="0" anchor="ctr"/>
+          <a:lstStyle/>
+          <a:p>
+            <a:pPr algn="ctr"/>
+          </a:p>
+        </p:txBody>
+      </p:sp>
+      <p:sp>
+        <p:nvSpPr>
+          <p:cNvPr id="43" name="C2-E13 rect 41" descr="sci-ppt:o041"/>
+          <p:cNvSpPr/>
           <p:nvPr/>
-        </p:nvCxnSpPr>
-        <p:spPr>
-          <a:xfrm flipV="1">
-            <a:off x="6339840" y="1524000"/>
-            <a:ext cx="0" cy="2438399"/>
-          </a:xfrm>
-          <a:prstGeom prst="line">
+        </p:nvSpPr>
+        <p:spPr>
+          <a:xfrm>
+            <a:off x="4018134" y="1371600"/>
+            <a:ext cx="94052" cy="3657600"/>
+          </a:xfrm>
+          <a:prstGeom prst="rect">
             <a:avLst/>
           </a:prstGeom>
-          <a:ln w="25400">
+          <a:solidFill>
+            <a:srgbClr val="F28BA0">
+              <a:alpha val="25000"/>
+            </a:srgbClr>
+          </a:solidFill>
+          <a:ln>
             <a:solidFill>
-              <a:srgbClr val="8EDBD4"/>
+              <a:srgbClr val="F28BA0">
+                <a:alpha val="25000"/>
+              </a:srgbClr>
             </a:solidFill>
-            <a:headEnd type="none" w="med" len="med"/>
-            <a:tailEnd type="triangle" w="med" len="med"/>
           </a:ln>
           <a:effectLst/>
         </p:spPr>
-      </p:cxnSp>
-      <p:sp>
-        <p:nvSpPr>
-          <p:cNvPr id="7" name="text6" descr="sci-ppt:C2-E13-006"/>
+        <p:txBody>
+          <a:bodyPr rtlCol="0" anchor="ctr"/>
+          <a:lstStyle/>
+          <a:p>
+            <a:pPr algn="ctr"/>
+          </a:p>
+        </p:txBody>
+      </p:sp>
+      <p:sp>
+        <p:nvSpPr>
+          <p:cNvPr id="44" name="C2-E13 text 42" descr="sci-ppt:o042"/>
           <p:cNvSpPr txBox="1"/>
           <p:nvPr/>
         </p:nvSpPr>
         <p:spPr>
           <a:xfrm>
-            <a:off x="9814560" y="4084320"/>
-            <a:ext cx="1828800" cy="321259"/>
+            <a:off x="2464961" y="1776455"/>
+            <a:ext cx="1554480" cy="402081"/>
           </a:xfrm>
           <a:prstGeom prst="rect">
             <a:avLst/>
@@ -3274,7 +5252,7 @@
           <a:effectLst/>
         </p:spPr>
         <p:txBody>
-          <a:bodyPr wrap="none" lIns="27432" rIns="27432" tIns="18288" bIns="18288" anchor="ctr">
+          <a:bodyPr wrap="none" lIns="18288" rIns="18288" tIns="18288" bIns="18288" anchor="t">
             <a:spAutoFit/>
           </a:bodyPr>
           <a:lstStyle/>
@@ -3285,39 +5263,367 @@
               </a:spcAft>
             </a:pPr>
             <a:r>
-              <a:rPr sz="1632" b="0" i="0">
+              <a:rPr sz="1150" b="0" i="0">
+                <a:solidFill>
+                  <a:srgbClr val="F28BA0"/>
+                </a:solidFill>
+                <a:latin typeface="Arial"/>
+              </a:rPr>
+              <a:t>gap 303–304 K:</a:t>
+            </a:r>
+          </a:p>
+          <a:p>
+            <a:pPr algn="l">
+              <a:spcAft>
+                <a:spcPts val="0"/>
+              </a:spcAft>
+            </a:pPr>
+            <a:r>
+              <a:rPr sz="1150" b="0" i="0">
+                <a:solidFill>
+                  <a:srgbClr val="F28BA0"/>
+                </a:solidFill>
+                <a:latin typeface="Arial"/>
+              </a:rPr>
+              <a:t>no value assigned</a:t>
+            </a:r>
+          </a:p>
+        </p:txBody>
+      </p:sp>
+      <p:sp>
+        <p:nvSpPr>
+          <p:cNvPr id="45" name="C2-E13 text 43" descr="sci-ppt:o043"/>
+          <p:cNvSpPr txBox="1"/>
+          <p:nvPr/>
+        </p:nvSpPr>
+        <p:spPr>
+          <a:xfrm>
+            <a:off x="1175657" y="4112242"/>
+            <a:ext cx="2560320" cy="239395"/>
+          </a:xfrm>
+          <a:prstGeom prst="rect">
+            <a:avLst/>
+          </a:prstGeom>
+          <a:noFill/>
+          <a:effectLst/>
+        </p:spPr>
+        <p:txBody>
+          <a:bodyPr wrap="none" lIns="18288" rIns="18288" tIns="18288" bIns="18288" anchor="t">
+            <a:spAutoFit/>
+          </a:bodyPr>
+          <a:lstStyle/>
+          <a:p>
+            <a:pPr algn="l">
+              <a:spcAft>
+                <a:spcPts val="0"/>
+              </a:spcAft>
+            </a:pPr>
+            <a:r>
+              <a:rPr sz="1250" b="0" i="0">
+                <a:solidFill>
+                  <a:srgbClr val="7FC8F8"/>
+                </a:solidFill>
+                <a:latin typeface="Arial"/>
+              </a:rPr>
+              <a:t>water (two fitted branches)</a:t>
+            </a:r>
+          </a:p>
+        </p:txBody>
+      </p:sp>
+      <p:sp>
+        <p:nvSpPr>
+          <p:cNvPr id="46" name="C2-E13 text 44" descr="sci-ppt:o044"/>
+          <p:cNvSpPr txBox="1"/>
+          <p:nvPr/>
+        </p:nvSpPr>
+        <p:spPr>
+          <a:xfrm>
+            <a:off x="5784233" y="1448657"/>
+            <a:ext cx="914400" cy="247142"/>
+          </a:xfrm>
+          <a:prstGeom prst="rect">
+            <a:avLst/>
+          </a:prstGeom>
+          <a:noFill/>
+          <a:effectLst/>
+        </p:spPr>
+        <p:txBody>
+          <a:bodyPr wrap="none" lIns="18288" rIns="18288" tIns="18288" bIns="18288" anchor="t">
+            <a:spAutoFit/>
+          </a:bodyPr>
+          <a:lstStyle/>
+          <a:p>
+            <a:pPr algn="l">
+              <a:spcAft>
+                <a:spcPts val="0"/>
+              </a:spcAft>
+            </a:pPr>
+            <a:r>
+              <a:rPr sz="1300" b="0" i="0">
+                <a:solidFill>
+                  <a:srgbClr val="8EDBD4"/>
+                </a:solidFill>
+                <a:latin typeface="Arial"/>
+              </a:rPr>
+              <a:t>PFP</a:t>
+            </a:r>
+          </a:p>
+        </p:txBody>
+      </p:sp>
+      <p:sp>
+        <p:nvSpPr>
+          <p:cNvPr id="47" name="C2-E13 ellipse 45" descr="sci-ppt:o045"/>
+          <p:cNvSpPr/>
+          <p:nvPr/>
+        </p:nvSpPr>
+        <p:spPr>
+          <a:xfrm>
+            <a:off x="5840142" y="3197176"/>
+            <a:ext cx="146304" cy="146304"/>
+          </a:xfrm>
+          <a:prstGeom prst="ellipse">
+            <a:avLst/>
+          </a:prstGeom>
+          <a:solidFill>
+            <a:srgbClr val="7FC8F8"/>
+          </a:solidFill>
+          <a:ln w="12700">
+            <a:solidFill>
+              <a:srgbClr val="7FC8F8"/>
+            </a:solidFill>
+          </a:ln>
+          <a:effectLst/>
+        </p:spPr>
+        <p:txBody>
+          <a:bodyPr rtlCol="0" anchor="ctr"/>
+          <a:lstStyle/>
+          <a:p>
+            <a:pPr algn="ctr"/>
+          </a:p>
+        </p:txBody>
+      </p:sp>
+      <p:sp>
+        <p:nvSpPr>
+          <p:cNvPr id="48" name="C2-E13 text 46" descr="sci-ppt:o046"/>
+          <p:cNvSpPr txBox="1"/>
+          <p:nvPr/>
+        </p:nvSpPr>
+        <p:spPr>
+          <a:xfrm>
+            <a:off x="4724574" y="2858848"/>
+            <a:ext cx="1097280" cy="231648"/>
+          </a:xfrm>
+          <a:prstGeom prst="rect">
+            <a:avLst/>
+          </a:prstGeom>
+          <a:noFill/>
+          <a:effectLst/>
+        </p:spPr>
+        <p:txBody>
+          <a:bodyPr wrap="none" lIns="18288" rIns="18288" tIns="18288" bIns="18288" anchor="t">
+            <a:spAutoFit/>
+          </a:bodyPr>
+          <a:lstStyle/>
+          <a:p>
+            <a:pPr algn="l">
+              <a:spcAft>
+                <a:spcPts val="0"/>
+              </a:spcAft>
+            </a:pPr>
+            <a:r>
+              <a:rPr sz="1200" b="0" i="0">
+                <a:solidFill>
+                  <a:srgbClr val="7FC8F8"/>
+                </a:solidFill>
+                <a:latin typeface="Arial"/>
+              </a:rPr>
+              <a:t>0.12 bar</a:t>
+            </a:r>
+          </a:p>
+        </p:txBody>
+      </p:sp>
+      <p:sp>
+        <p:nvSpPr>
+          <p:cNvPr id="49" name="C2-E13 ellipse 47" descr="sci-ppt:o047"/>
+          <p:cNvSpPr/>
+          <p:nvPr/>
+        </p:nvSpPr>
+        <p:spPr>
+          <a:xfrm>
+            <a:off x="5840142" y="1755008"/>
+            <a:ext cx="146304" cy="146304"/>
+          </a:xfrm>
+          <a:prstGeom prst="ellipse">
+            <a:avLst/>
+          </a:prstGeom>
+          <a:solidFill>
+            <a:srgbClr val="8EDBD4"/>
+          </a:solidFill>
+          <a:ln w="12700">
+            <a:solidFill>
+              <a:srgbClr val="8EDBD4"/>
+            </a:solidFill>
+          </a:ln>
+          <a:effectLst/>
+        </p:spPr>
+        <p:txBody>
+          <a:bodyPr rtlCol="0" anchor="ctr"/>
+          <a:lstStyle/>
+          <a:p>
+            <a:pPr algn="ctr"/>
+          </a:p>
+        </p:txBody>
+      </p:sp>
+      <p:sp>
+        <p:nvSpPr>
+          <p:cNvPr id="50" name="C2-E13 text 48" descr="sci-ppt:o048"/>
+          <p:cNvSpPr txBox="1"/>
+          <p:nvPr/>
+        </p:nvSpPr>
+        <p:spPr>
+          <a:xfrm>
+            <a:off x="4724574" y="1416680"/>
+            <a:ext cx="1097280" cy="231648"/>
+          </a:xfrm>
+          <a:prstGeom prst="rect">
+            <a:avLst/>
+          </a:prstGeom>
+          <a:noFill/>
+          <a:effectLst/>
+        </p:spPr>
+        <p:txBody>
+          <a:bodyPr wrap="none" lIns="18288" rIns="18288" tIns="18288" bIns="18288" anchor="t">
+            <a:spAutoFit/>
+          </a:bodyPr>
+          <a:lstStyle/>
+          <a:p>
+            <a:pPr algn="l">
+              <a:spcAft>
+                <a:spcPts val="0"/>
+              </a:spcAft>
+            </a:pPr>
+            <a:r>
+              <a:rPr sz="1200" b="0" i="0">
+                <a:solidFill>
+                  <a:srgbClr val="8EDBD4"/>
+                </a:solidFill>
+                <a:latin typeface="Arial"/>
+              </a:rPr>
+              <a:t>2.05 bar</a:t>
+            </a:r>
+          </a:p>
+        </p:txBody>
+      </p:sp>
+      <p:sp>
+        <p:nvSpPr>
+          <p:cNvPr id="51" name="C2-E13 round_rect 49" descr="sci-ppt:o049"/>
+          <p:cNvSpPr/>
+          <p:nvPr/>
+        </p:nvSpPr>
+        <p:spPr>
+          <a:xfrm>
+            <a:off x="7772400" y="1371600"/>
+            <a:ext cx="4069080" cy="3657600"/>
+          </a:xfrm>
+          <a:prstGeom prst="roundRect">
+            <a:avLst/>
+          </a:prstGeom>
+          <a:solidFill>
+            <a:srgbClr val="213E4B"/>
+          </a:solidFill>
+          <a:ln w="20320">
+            <a:solidFill>
+              <a:srgbClr val="8EDBD4"/>
+            </a:solidFill>
+          </a:ln>
+          <a:effectLst/>
+        </p:spPr>
+        <p:txBody>
+          <a:bodyPr rtlCol="0" anchor="ctr"/>
+          <a:lstStyle/>
+          <a:p>
+            <a:pPr algn="ctr"/>
+          </a:p>
+        </p:txBody>
+      </p:sp>
+      <p:sp>
+        <p:nvSpPr>
+          <p:cNvPr id="52" name="C2-E13 text 50" descr="sci-ppt:o050"/>
+          <p:cNvSpPr txBox="1"/>
+          <p:nvPr/>
+        </p:nvSpPr>
+        <p:spPr>
+          <a:xfrm>
+            <a:off x="7882127" y="1426464"/>
+            <a:ext cx="3849624" cy="254889"/>
+          </a:xfrm>
+          <a:prstGeom prst="rect">
+            <a:avLst/>
+          </a:prstGeom>
+          <a:noFill/>
+          <a:effectLst/>
+        </p:spPr>
+        <p:txBody>
+          <a:bodyPr wrap="none" lIns="18288" rIns="18288" tIns="18288" bIns="18288" anchor="t">
+            <a:spAutoFit/>
+          </a:bodyPr>
+          <a:lstStyle/>
+          <a:p>
+            <a:pPr algn="l">
+              <a:spcAft>
+                <a:spcPts val="0"/>
+              </a:spcAft>
+            </a:pPr>
+            <a:r>
+              <a:rPr sz="1350" b="1" i="0">
+                <a:solidFill>
+                  <a:srgbClr val="8EDBD4"/>
+                </a:solidFill>
+                <a:latin typeface="Arial"/>
+              </a:rPr>
+              <a:t>A reference, not a reservoir</a:t>
+            </a:r>
+          </a:p>
+        </p:txBody>
+      </p:sp>
+      <p:sp>
+        <p:nvSpPr>
+          <p:cNvPr id="53" name="C2-E13 text 51" descr="sci-ppt:o051"/>
+          <p:cNvSpPr txBox="1"/>
+          <p:nvPr/>
+        </p:nvSpPr>
+        <p:spPr>
+          <a:xfrm>
+            <a:off x="8110728" y="1828800"/>
+            <a:ext cx="3639312" cy="626745"/>
+          </a:xfrm>
+          <a:prstGeom prst="rect">
+            <a:avLst/>
+          </a:prstGeom>
+          <a:noFill/>
+          <a:effectLst/>
+        </p:spPr>
+        <p:txBody>
+          <a:bodyPr wrap="none" lIns="18288" rIns="18288" tIns="18288" bIns="18288" anchor="t">
+            <a:spAutoFit/>
+          </a:bodyPr>
+          <a:lstStyle/>
+          <a:p>
+            <a:pPr algn="l">
+              <a:spcAft>
+                <a:spcPts val="0"/>
+              </a:spcAft>
+            </a:pPr>
+            <a:r>
+              <a:rPr sz="1250" b="0" i="0">
                 <a:solidFill>
                   <a:srgbClr val="E7F0F3"/>
                 </a:solidFill>
                 <a:latin typeface="Arial"/>
               </a:rPr>
-              <a:t>Temperature</a:t>
-            </a:r>
-          </a:p>
-        </p:txBody>
-      </p:sp>
-      <p:sp>
-        <p:nvSpPr>
-          <p:cNvPr id="8" name="text7" descr="sci-ppt:C2-E13-007"/>
-          <p:cNvSpPr txBox="1"/>
-          <p:nvPr/>
-        </p:nvSpPr>
-        <p:spPr>
-          <a:xfrm>
-            <a:off x="6217920" y="1158240"/>
-            <a:ext cx="3657600" cy="321259"/>
-          </a:xfrm>
-          <a:prstGeom prst="rect">
-            <a:avLst/>
-          </a:prstGeom>
-          <a:noFill/>
-          <a:effectLst/>
-        </p:spPr>
-        <p:txBody>
-          <a:bodyPr wrap="none" lIns="27432" rIns="27432" tIns="18288" bIns="18288" anchor="ctr">
-            <a:spAutoFit/>
-          </a:bodyPr>
-          <a:lstStyle/>
+              <a:t>Water is the matched-temperature</a:t>
+            </a:r>
+          </a:p>
           <a:p>
             <a:pPr algn="l">
               <a:spcAft>
@@ -3325,687 +5631,251 @@
               </a:spcAft>
             </a:pPr>
             <a:r>
-              <a:rPr sz="1632" b="0" i="0">
+              <a:rPr sz="1250" b="0" i="0">
                 <a:solidFill>
                   <a:srgbClr val="E7F0F3"/>
                 </a:solidFill>
                 <a:latin typeface="Arial"/>
               </a:rPr>
-              <a:t>Saturation pressure</a:t>
-            </a:r>
-          </a:p>
-        </p:txBody>
-      </p:sp>
-      <p:cxnSp>
-        <p:nvCxnSpPr>
-          <p:cNvPr id="9" name="line8" descr="sci-ppt:C2-E13-008"/>
-          <p:cNvCxnSpPr/>
+              <a:t>comparison: 0.12 bar at 323 K against 2.05</a:t>
+            </a:r>
+          </a:p>
+          <a:p>
+            <a:pPr algn="l">
+              <a:spcAft>
+                <a:spcPts val="0"/>
+              </a:spcAft>
+            </a:pPr>
+            <a:r>
+              <a:rPr sz="1250" b="0" i="0">
+                <a:solidFill>
+                  <a:srgbClr val="E7F0F3"/>
+                </a:solidFill>
+                <a:latin typeface="Arial"/>
+              </a:rPr>
+              <a:t>bar for PFP.</a:t>
+            </a:r>
+          </a:p>
+        </p:txBody>
+      </p:sp>
+      <p:sp>
+        <p:nvSpPr>
+          <p:cNvPr id="54" name="C2-E13 ellipse 52" descr="sci-ppt:o052"/>
+          <p:cNvSpPr/>
           <p:nvPr/>
-        </p:nvCxnSpPr>
-        <p:spPr>
-          <a:xfrm flipV="1">
-            <a:off x="6400800" y="3838041"/>
-            <a:ext cx="142239" cy="2439"/>
-          </a:xfrm>
-          <a:prstGeom prst="line">
+        </p:nvSpPr>
+        <p:spPr>
+          <a:xfrm>
+            <a:off x="7941564" y="1886077"/>
+            <a:ext cx="82296" cy="82296"/>
+          </a:xfrm>
+          <a:prstGeom prst="ellipse">
             <a:avLst/>
           </a:prstGeom>
-          <a:ln w="25400">
+          <a:solidFill>
+            <a:srgbClr val="8EDBD4"/>
+          </a:solidFill>
+          <a:ln w="12700">
             <a:solidFill>
               <a:srgbClr val="8EDBD4"/>
             </a:solidFill>
           </a:ln>
           <a:effectLst/>
         </p:spPr>
-      </p:cxnSp>
-      <p:cxnSp>
-        <p:nvCxnSpPr>
-          <p:cNvPr id="10" name="line9" descr="sci-ppt:C2-E13-009"/>
-          <p:cNvCxnSpPr/>
+        <p:txBody>
+          <a:bodyPr rtlCol="0" anchor="ctr"/>
+          <a:lstStyle/>
+          <a:p>
+            <a:pPr algn="ctr"/>
+          </a:p>
+        </p:txBody>
+      </p:sp>
+      <p:sp>
+        <p:nvSpPr>
+          <p:cNvPr id="55" name="C2-E13 text 53" descr="sci-ppt:o053"/>
+          <p:cNvSpPr txBox="1"/>
           <p:nvPr/>
-        </p:nvCxnSpPr>
-        <p:spPr>
-          <a:xfrm flipV="1">
-            <a:off x="6543039" y="3830726"/>
-            <a:ext cx="142241" cy="7315"/>
-          </a:xfrm>
-          <a:prstGeom prst="line">
+        </p:nvSpPr>
+        <p:spPr>
+          <a:xfrm>
+            <a:off x="8110728" y="2501265"/>
+            <a:ext cx="3639312" cy="433070"/>
+          </a:xfrm>
+          <a:prstGeom prst="rect">
             <a:avLst/>
           </a:prstGeom>
-          <a:ln w="25400">
+          <a:noFill/>
+          <a:effectLst/>
+        </p:spPr>
+        <p:txBody>
+          <a:bodyPr wrap="none" lIns="18288" rIns="18288" tIns="18288" bIns="18288" anchor="t">
+            <a:spAutoFit/>
+          </a:bodyPr>
+          <a:lstStyle/>
+          <a:p>
+            <a:pPr algn="l">
+              <a:spcAft>
+                <a:spcPts val="0"/>
+              </a:spcAft>
+            </a:pPr>
+            <a:r>
+              <a:rPr sz="1250" b="0" i="0">
+                <a:solidFill>
+                  <a:srgbClr val="E7F0F3"/>
+                </a:solidFill>
+                <a:latin typeface="Arial"/>
+              </a:rPr>
+              <a:t>Each water branch is valid only inside its</a:t>
+            </a:r>
+          </a:p>
+          <a:p>
+            <a:pPr algn="l">
+              <a:spcAft>
+                <a:spcPts val="0"/>
+              </a:spcAft>
+            </a:pPr>
+            <a:r>
+              <a:rPr sz="1250" b="0" i="0">
+                <a:solidFill>
+                  <a:srgbClr val="E7F0F3"/>
+                </a:solidFill>
+                <a:latin typeface="Arial"/>
+              </a:rPr>
+              <a:t>own interval, 273–303 K and 304–333 K.</a:t>
+            </a:r>
+          </a:p>
+        </p:txBody>
+      </p:sp>
+      <p:sp>
+        <p:nvSpPr>
+          <p:cNvPr id="56" name="C2-E13 ellipse 54" descr="sci-ppt:o054"/>
+          <p:cNvSpPr/>
+          <p:nvPr/>
+        </p:nvSpPr>
+        <p:spPr>
+          <a:xfrm>
+            <a:off x="7941564" y="2558542"/>
+            <a:ext cx="82296" cy="82296"/>
+          </a:xfrm>
+          <a:prstGeom prst="ellipse">
+            <a:avLst/>
+          </a:prstGeom>
+          <a:solidFill>
+            <a:srgbClr val="8EDBD4"/>
+          </a:solidFill>
+          <a:ln w="12700">
             <a:solidFill>
               <a:srgbClr val="8EDBD4"/>
             </a:solidFill>
           </a:ln>
           <a:effectLst/>
         </p:spPr>
-      </p:cxnSp>
-      <p:cxnSp>
-        <p:nvCxnSpPr>
-          <p:cNvPr id="11" name="line10" descr="sci-ppt:C2-E13-010"/>
-          <p:cNvCxnSpPr/>
+        <p:txBody>
+          <a:bodyPr rtlCol="0" anchor="ctr"/>
+          <a:lstStyle/>
+          <a:p>
+            <a:pPr algn="ctr"/>
+          </a:p>
+        </p:txBody>
+      </p:sp>
+      <p:sp>
+        <p:nvSpPr>
+          <p:cNvPr id="57" name="C2-E13 text 55" descr="sci-ppt:o055"/>
+          <p:cNvSpPr txBox="1"/>
           <p:nvPr/>
-        </p:nvCxnSpPr>
-        <p:spPr>
-          <a:xfrm flipV="1">
-            <a:off x="6685280" y="3818534"/>
-            <a:ext cx="142240" cy="12192"/>
-          </a:xfrm>
-          <a:prstGeom prst="line">
+        </p:nvSpPr>
+        <p:spPr>
+          <a:xfrm>
+            <a:off x="8110728" y="2980054"/>
+            <a:ext cx="3639312" cy="433070"/>
+          </a:xfrm>
+          <a:prstGeom prst="rect">
             <a:avLst/>
           </a:prstGeom>
-          <a:ln w="25400">
+          <a:noFill/>
+          <a:effectLst/>
+        </p:spPr>
+        <p:txBody>
+          <a:bodyPr wrap="none" lIns="18288" rIns="18288" tIns="18288" bIns="18288" anchor="t">
+            <a:spAutoFit/>
+          </a:bodyPr>
+          <a:lstStyle/>
+          <a:p>
+            <a:pPr algn="l">
+              <a:spcAft>
+                <a:spcPts val="0"/>
+              </a:spcAft>
+            </a:pPr>
+            <a:r>
+              <a:rPr sz="1250" b="0" i="0">
+                <a:solidFill>
+                  <a:srgbClr val="E7F0F3"/>
+                </a:solidFill>
+                <a:latin typeface="Arial"/>
+              </a:rPr>
+              <a:t>The formulas give equilibrium values; they</a:t>
+            </a:r>
+          </a:p>
+          <a:p>
+            <a:pPr algn="l">
+              <a:spcAft>
+                <a:spcPts val="0"/>
+              </a:spcAft>
+            </a:pPr>
+            <a:r>
+              <a:rPr sz="1250" b="0" i="0">
+                <a:solidFill>
+                  <a:srgbClr val="E7F0F3"/>
+                </a:solidFill>
+                <a:latin typeface="Arial"/>
+              </a:rPr>
+              <a:t>do not promise that vapor is available.</a:t>
+            </a:r>
+          </a:p>
+        </p:txBody>
+      </p:sp>
+      <p:sp>
+        <p:nvSpPr>
+          <p:cNvPr id="58" name="C2-E13 ellipse 56" descr="sci-ppt:o056"/>
+          <p:cNvSpPr/>
+          <p:nvPr/>
+        </p:nvSpPr>
+        <p:spPr>
+          <a:xfrm>
+            <a:off x="7941564" y="3037331"/>
+            <a:ext cx="82296" cy="82296"/>
+          </a:xfrm>
+          <a:prstGeom prst="ellipse">
+            <a:avLst/>
+          </a:prstGeom>
+          <a:solidFill>
+            <a:srgbClr val="8EDBD4"/>
+          </a:solidFill>
+          <a:ln w="12700">
             <a:solidFill>
               <a:srgbClr val="8EDBD4"/>
             </a:solidFill>
           </a:ln>
           <a:effectLst/>
         </p:spPr>
-      </p:cxnSp>
-      <p:cxnSp>
-        <p:nvCxnSpPr>
-          <p:cNvPr id="12" name="line11" descr="sci-ppt:C2-E13-011"/>
-          <p:cNvCxnSpPr/>
-          <p:nvPr/>
-        </p:nvCxnSpPr>
-        <p:spPr>
-          <a:xfrm flipV="1">
-            <a:off x="6827520" y="3801465"/>
-            <a:ext cx="142240" cy="17069"/>
-          </a:xfrm>
-          <a:prstGeom prst="line">
-            <a:avLst/>
-          </a:prstGeom>
-          <a:ln w="25400">
-            <a:solidFill>
-              <a:srgbClr val="8EDBD4"/>
-            </a:solidFill>
-          </a:ln>
-          <a:effectLst/>
-        </p:spPr>
-      </p:cxnSp>
-      <p:cxnSp>
-        <p:nvCxnSpPr>
-          <p:cNvPr id="13" name="line12" descr="sci-ppt:C2-E13-012"/>
-          <p:cNvCxnSpPr/>
-          <p:nvPr/>
-        </p:nvCxnSpPr>
-        <p:spPr>
-          <a:xfrm flipV="1">
-            <a:off x="6969760" y="3779520"/>
-            <a:ext cx="142240" cy="21945"/>
-          </a:xfrm>
-          <a:prstGeom prst="line">
-            <a:avLst/>
-          </a:prstGeom>
-          <a:ln w="25400">
-            <a:solidFill>
-              <a:srgbClr val="8EDBD4"/>
-            </a:solidFill>
-          </a:ln>
-          <a:effectLst/>
-        </p:spPr>
-      </p:cxnSp>
-      <p:cxnSp>
-        <p:nvCxnSpPr>
-          <p:cNvPr id="14" name="line13" descr="sci-ppt:C2-E13-013"/>
-          <p:cNvCxnSpPr/>
-          <p:nvPr/>
-        </p:nvCxnSpPr>
-        <p:spPr>
-          <a:xfrm flipV="1">
-            <a:off x="7112000" y="3752697"/>
-            <a:ext cx="142240" cy="26823"/>
-          </a:xfrm>
-          <a:prstGeom prst="line">
-            <a:avLst/>
-          </a:prstGeom>
-          <a:ln w="25400">
-            <a:solidFill>
-              <a:srgbClr val="8EDBD4"/>
-            </a:solidFill>
-          </a:ln>
-          <a:effectLst/>
-        </p:spPr>
-      </p:cxnSp>
-      <p:cxnSp>
-        <p:nvCxnSpPr>
-          <p:cNvPr id="15" name="line14" descr="sci-ppt:C2-E13-014"/>
-          <p:cNvCxnSpPr/>
-          <p:nvPr/>
-        </p:nvCxnSpPr>
-        <p:spPr>
-          <a:xfrm flipV="1">
-            <a:off x="7254240" y="3720998"/>
-            <a:ext cx="142240" cy="31699"/>
-          </a:xfrm>
-          <a:prstGeom prst="line">
-            <a:avLst/>
-          </a:prstGeom>
-          <a:ln w="25400">
-            <a:solidFill>
-              <a:srgbClr val="8EDBD4"/>
-            </a:solidFill>
-          </a:ln>
-          <a:effectLst/>
-        </p:spPr>
-      </p:cxnSp>
-      <p:cxnSp>
-        <p:nvCxnSpPr>
-          <p:cNvPr id="16" name="line15" descr="sci-ppt:C2-E13-015"/>
-          <p:cNvCxnSpPr/>
-          <p:nvPr/>
-        </p:nvCxnSpPr>
-        <p:spPr>
-          <a:xfrm flipV="1">
-            <a:off x="7396480" y="3684422"/>
-            <a:ext cx="142240" cy="36576"/>
-          </a:xfrm>
-          <a:prstGeom prst="line">
-            <a:avLst/>
-          </a:prstGeom>
-          <a:ln w="25400">
-            <a:solidFill>
-              <a:srgbClr val="8EDBD4"/>
-            </a:solidFill>
-          </a:ln>
-          <a:effectLst/>
-        </p:spPr>
-      </p:cxnSp>
-      <p:cxnSp>
-        <p:nvCxnSpPr>
-          <p:cNvPr id="17" name="line16" descr="sci-ppt:C2-E13-016"/>
-          <p:cNvCxnSpPr/>
-          <p:nvPr/>
-        </p:nvCxnSpPr>
-        <p:spPr>
-          <a:xfrm flipV="1">
-            <a:off x="7538720" y="3642969"/>
-            <a:ext cx="142240" cy="41453"/>
-          </a:xfrm>
-          <a:prstGeom prst="line">
-            <a:avLst/>
-          </a:prstGeom>
-          <a:ln w="25400">
-            <a:solidFill>
-              <a:srgbClr val="8EDBD4"/>
-            </a:solidFill>
-          </a:ln>
-          <a:effectLst/>
-        </p:spPr>
-      </p:cxnSp>
-      <p:cxnSp>
-        <p:nvCxnSpPr>
-          <p:cNvPr id="18" name="line17" descr="sci-ppt:C2-E13-017"/>
-          <p:cNvCxnSpPr/>
-          <p:nvPr/>
-        </p:nvCxnSpPr>
-        <p:spPr>
-          <a:xfrm flipV="1">
-            <a:off x="7680960" y="3596640"/>
-            <a:ext cx="142240" cy="46329"/>
-          </a:xfrm>
-          <a:prstGeom prst="line">
-            <a:avLst/>
-          </a:prstGeom>
-          <a:ln w="25400">
-            <a:solidFill>
-              <a:srgbClr val="8EDBD4"/>
-            </a:solidFill>
-          </a:ln>
-          <a:effectLst/>
-        </p:spPr>
-      </p:cxnSp>
-      <p:cxnSp>
-        <p:nvCxnSpPr>
-          <p:cNvPr id="19" name="line18" descr="sci-ppt:C2-E13-018"/>
-          <p:cNvCxnSpPr/>
-          <p:nvPr/>
-        </p:nvCxnSpPr>
-        <p:spPr>
-          <a:xfrm flipV="1">
-            <a:off x="7823200" y="3545433"/>
-            <a:ext cx="142240" cy="51207"/>
-          </a:xfrm>
-          <a:prstGeom prst="line">
-            <a:avLst/>
-          </a:prstGeom>
-          <a:ln w="25400">
-            <a:solidFill>
-              <a:srgbClr val="8EDBD4"/>
-            </a:solidFill>
-          </a:ln>
-          <a:effectLst/>
-        </p:spPr>
-      </p:cxnSp>
-      <p:cxnSp>
-        <p:nvCxnSpPr>
-          <p:cNvPr id="20" name="line19" descr="sci-ppt:C2-E13-019"/>
-          <p:cNvCxnSpPr/>
-          <p:nvPr/>
-        </p:nvCxnSpPr>
-        <p:spPr>
-          <a:xfrm flipV="1">
-            <a:off x="7965440" y="3489350"/>
-            <a:ext cx="142240" cy="56083"/>
-          </a:xfrm>
-          <a:prstGeom prst="line">
-            <a:avLst/>
-          </a:prstGeom>
-          <a:ln w="25400">
-            <a:solidFill>
-              <a:srgbClr val="8EDBD4"/>
-            </a:solidFill>
-          </a:ln>
-          <a:effectLst/>
-        </p:spPr>
-      </p:cxnSp>
-      <p:cxnSp>
-        <p:nvCxnSpPr>
-          <p:cNvPr id="21" name="line20" descr="sci-ppt:C2-E13-020"/>
-          <p:cNvCxnSpPr/>
-          <p:nvPr/>
-        </p:nvCxnSpPr>
-        <p:spPr>
-          <a:xfrm flipV="1">
-            <a:off x="8107680" y="3428390"/>
-            <a:ext cx="142240" cy="60960"/>
-          </a:xfrm>
-          <a:prstGeom prst="line">
-            <a:avLst/>
-          </a:prstGeom>
-          <a:ln w="25400">
-            <a:solidFill>
-              <a:srgbClr val="8EDBD4"/>
-            </a:solidFill>
-          </a:ln>
-          <a:effectLst/>
-        </p:spPr>
-      </p:cxnSp>
-      <p:cxnSp>
-        <p:nvCxnSpPr>
-          <p:cNvPr id="22" name="line21" descr="sci-ppt:C2-E13-021"/>
-          <p:cNvCxnSpPr/>
-          <p:nvPr/>
-        </p:nvCxnSpPr>
-        <p:spPr>
-          <a:xfrm flipV="1">
-            <a:off x="8249920" y="3362553"/>
-            <a:ext cx="142240" cy="65837"/>
-          </a:xfrm>
-          <a:prstGeom prst="line">
-            <a:avLst/>
-          </a:prstGeom>
-          <a:ln w="25400">
-            <a:solidFill>
-              <a:srgbClr val="8EDBD4"/>
-            </a:solidFill>
-          </a:ln>
-          <a:effectLst/>
-        </p:spPr>
-      </p:cxnSp>
-      <p:cxnSp>
-        <p:nvCxnSpPr>
-          <p:cNvPr id="23" name="line22" descr="sci-ppt:C2-E13-022"/>
-          <p:cNvCxnSpPr/>
-          <p:nvPr/>
-        </p:nvCxnSpPr>
-        <p:spPr>
-          <a:xfrm flipV="1">
-            <a:off x="8392160" y="3291840"/>
-            <a:ext cx="142240" cy="70713"/>
-          </a:xfrm>
-          <a:prstGeom prst="line">
-            <a:avLst/>
-          </a:prstGeom>
-          <a:ln w="25400">
-            <a:solidFill>
-              <a:srgbClr val="8EDBD4"/>
-            </a:solidFill>
-          </a:ln>
-          <a:effectLst/>
-        </p:spPr>
-      </p:cxnSp>
-      <p:cxnSp>
-        <p:nvCxnSpPr>
-          <p:cNvPr id="24" name="line23" descr="sci-ppt:C2-E13-023"/>
-          <p:cNvCxnSpPr/>
-          <p:nvPr/>
-        </p:nvCxnSpPr>
-        <p:spPr>
-          <a:xfrm flipV="1">
-            <a:off x="8534400" y="3216249"/>
-            <a:ext cx="142240" cy="75591"/>
-          </a:xfrm>
-          <a:prstGeom prst="line">
-            <a:avLst/>
-          </a:prstGeom>
-          <a:ln w="25400">
-            <a:solidFill>
-              <a:srgbClr val="8EDBD4"/>
-            </a:solidFill>
-          </a:ln>
-          <a:effectLst/>
-        </p:spPr>
-      </p:cxnSp>
-      <p:cxnSp>
-        <p:nvCxnSpPr>
-          <p:cNvPr id="25" name="line24" descr="sci-ppt:C2-E13-024"/>
-          <p:cNvCxnSpPr/>
-          <p:nvPr/>
-        </p:nvCxnSpPr>
-        <p:spPr>
-          <a:xfrm flipV="1">
-            <a:off x="8676640" y="3135782"/>
-            <a:ext cx="142240" cy="80467"/>
-          </a:xfrm>
-          <a:prstGeom prst="line">
-            <a:avLst/>
-          </a:prstGeom>
-          <a:ln w="25400">
-            <a:solidFill>
-              <a:srgbClr val="8EDBD4"/>
-            </a:solidFill>
-          </a:ln>
-          <a:effectLst/>
-        </p:spPr>
-      </p:cxnSp>
-      <p:cxnSp>
-        <p:nvCxnSpPr>
-          <p:cNvPr id="26" name="line25" descr="sci-ppt:C2-E13-025"/>
-          <p:cNvCxnSpPr/>
-          <p:nvPr/>
-        </p:nvCxnSpPr>
-        <p:spPr>
-          <a:xfrm flipV="1">
-            <a:off x="8818880" y="3050438"/>
-            <a:ext cx="142240" cy="85344"/>
-          </a:xfrm>
-          <a:prstGeom prst="line">
-            <a:avLst/>
-          </a:prstGeom>
-          <a:ln w="25400">
-            <a:solidFill>
-              <a:srgbClr val="8EDBD4"/>
-            </a:solidFill>
-          </a:ln>
-          <a:effectLst/>
-        </p:spPr>
-      </p:cxnSp>
-      <p:cxnSp>
-        <p:nvCxnSpPr>
-          <p:cNvPr id="27" name="line26" descr="sci-ppt:C2-E13-026"/>
-          <p:cNvCxnSpPr/>
-          <p:nvPr/>
-        </p:nvCxnSpPr>
-        <p:spPr>
-          <a:xfrm flipV="1">
-            <a:off x="8961120" y="2960217"/>
-            <a:ext cx="142240" cy="90221"/>
-          </a:xfrm>
-          <a:prstGeom prst="line">
-            <a:avLst/>
-          </a:prstGeom>
-          <a:ln w="25400">
-            <a:solidFill>
-              <a:srgbClr val="8EDBD4"/>
-            </a:solidFill>
-          </a:ln>
-          <a:effectLst/>
-        </p:spPr>
-      </p:cxnSp>
-      <p:cxnSp>
-        <p:nvCxnSpPr>
-          <p:cNvPr id="28" name="line27" descr="sci-ppt:C2-E13-027"/>
-          <p:cNvCxnSpPr/>
-          <p:nvPr/>
-        </p:nvCxnSpPr>
-        <p:spPr>
-          <a:xfrm flipV="1">
-            <a:off x="9103360" y="2865120"/>
-            <a:ext cx="142240" cy="95097"/>
-          </a:xfrm>
-          <a:prstGeom prst="line">
-            <a:avLst/>
-          </a:prstGeom>
-          <a:ln w="25400">
-            <a:solidFill>
-              <a:srgbClr val="8EDBD4"/>
-            </a:solidFill>
-          </a:ln>
-          <a:effectLst/>
-        </p:spPr>
-      </p:cxnSp>
-      <p:cxnSp>
-        <p:nvCxnSpPr>
-          <p:cNvPr id="29" name="line28" descr="sci-ppt:C2-E13-028"/>
-          <p:cNvCxnSpPr/>
-          <p:nvPr/>
-        </p:nvCxnSpPr>
-        <p:spPr>
-          <a:xfrm flipV="1">
-            <a:off x="9245600" y="2765145"/>
-            <a:ext cx="142240" cy="99975"/>
-          </a:xfrm>
-          <a:prstGeom prst="line">
-            <a:avLst/>
-          </a:prstGeom>
-          <a:ln w="25400">
-            <a:solidFill>
-              <a:srgbClr val="8EDBD4"/>
-            </a:solidFill>
-          </a:ln>
-          <a:effectLst/>
-        </p:spPr>
-      </p:cxnSp>
-      <p:cxnSp>
-        <p:nvCxnSpPr>
-          <p:cNvPr id="30" name="line29" descr="sci-ppt:C2-E13-029"/>
-          <p:cNvCxnSpPr/>
-          <p:nvPr/>
-        </p:nvCxnSpPr>
-        <p:spPr>
-          <a:xfrm flipV="1">
-            <a:off x="9387840" y="2660294"/>
-            <a:ext cx="142240" cy="104851"/>
-          </a:xfrm>
-          <a:prstGeom prst="line">
-            <a:avLst/>
-          </a:prstGeom>
-          <a:ln w="25400">
-            <a:solidFill>
-              <a:srgbClr val="8EDBD4"/>
-            </a:solidFill>
-          </a:ln>
-          <a:effectLst/>
-        </p:spPr>
-      </p:cxnSp>
-      <p:cxnSp>
-        <p:nvCxnSpPr>
-          <p:cNvPr id="31" name="line30" descr="sci-ppt:C2-E13-030"/>
-          <p:cNvCxnSpPr/>
-          <p:nvPr/>
-        </p:nvCxnSpPr>
-        <p:spPr>
-          <a:xfrm flipV="1">
-            <a:off x="9530080" y="2550566"/>
-            <a:ext cx="142240" cy="109728"/>
-          </a:xfrm>
-          <a:prstGeom prst="line">
-            <a:avLst/>
-          </a:prstGeom>
-          <a:ln w="25400">
-            <a:solidFill>
-              <a:srgbClr val="8EDBD4"/>
-            </a:solidFill>
-          </a:ln>
-          <a:effectLst/>
-        </p:spPr>
-      </p:cxnSp>
-      <p:cxnSp>
-        <p:nvCxnSpPr>
-          <p:cNvPr id="32" name="line31" descr="sci-ppt:C2-E13-031"/>
-          <p:cNvCxnSpPr/>
-          <p:nvPr/>
-        </p:nvCxnSpPr>
-        <p:spPr>
-          <a:xfrm flipV="1">
-            <a:off x="9672320" y="2435961"/>
-            <a:ext cx="142240" cy="114605"/>
-          </a:xfrm>
-          <a:prstGeom prst="line">
-            <a:avLst/>
-          </a:prstGeom>
-          <a:ln w="25400">
-            <a:solidFill>
-              <a:srgbClr val="8EDBD4"/>
-            </a:solidFill>
-          </a:ln>
-          <a:effectLst/>
-        </p:spPr>
-      </p:cxnSp>
-      <p:cxnSp>
-        <p:nvCxnSpPr>
-          <p:cNvPr id="33" name="line32" descr="sci-ppt:C2-E13-032"/>
-          <p:cNvCxnSpPr/>
-          <p:nvPr/>
-        </p:nvCxnSpPr>
-        <p:spPr>
-          <a:xfrm flipV="1">
-            <a:off x="9814560" y="2316480"/>
-            <a:ext cx="142240" cy="119481"/>
-          </a:xfrm>
-          <a:prstGeom prst="line">
-            <a:avLst/>
-          </a:prstGeom>
-          <a:ln w="25400">
-            <a:solidFill>
-              <a:srgbClr val="8EDBD4"/>
-            </a:solidFill>
-          </a:ln>
-          <a:effectLst/>
-        </p:spPr>
-      </p:cxnSp>
-      <p:cxnSp>
-        <p:nvCxnSpPr>
-          <p:cNvPr id="34" name="line33" descr="sci-ppt:C2-E13-033"/>
-          <p:cNvCxnSpPr/>
-          <p:nvPr/>
-        </p:nvCxnSpPr>
-        <p:spPr>
-          <a:xfrm flipV="1">
-            <a:off x="9956800" y="2192121"/>
-            <a:ext cx="142240" cy="124359"/>
-          </a:xfrm>
-          <a:prstGeom prst="line">
-            <a:avLst/>
-          </a:prstGeom>
-          <a:ln w="25400">
-            <a:solidFill>
-              <a:srgbClr val="8EDBD4"/>
-            </a:solidFill>
-          </a:ln>
-          <a:effectLst/>
-        </p:spPr>
-      </p:cxnSp>
-      <p:cxnSp>
-        <p:nvCxnSpPr>
-          <p:cNvPr id="35" name="line34" descr="sci-ppt:C2-E13-034"/>
-          <p:cNvCxnSpPr/>
-          <p:nvPr/>
-        </p:nvCxnSpPr>
-        <p:spPr>
-          <a:xfrm flipV="1">
-            <a:off x="10099040" y="2062886"/>
-            <a:ext cx="142240" cy="129235"/>
-          </a:xfrm>
-          <a:prstGeom prst="line">
-            <a:avLst/>
-          </a:prstGeom>
-          <a:ln w="25400">
-            <a:solidFill>
-              <a:srgbClr val="8EDBD4"/>
-            </a:solidFill>
-          </a:ln>
-          <a:effectLst/>
-        </p:spPr>
-      </p:cxnSp>
-      <p:cxnSp>
-        <p:nvCxnSpPr>
-          <p:cNvPr id="36" name="line35" descr="sci-ppt:C2-E13-035"/>
-          <p:cNvCxnSpPr/>
-          <p:nvPr/>
-        </p:nvCxnSpPr>
-        <p:spPr>
-          <a:xfrm flipV="1">
-            <a:off x="10241280" y="1928774"/>
-            <a:ext cx="142240" cy="134112"/>
-          </a:xfrm>
-          <a:prstGeom prst="line">
-            <a:avLst/>
-          </a:prstGeom>
-          <a:ln w="25400">
-            <a:solidFill>
-              <a:srgbClr val="8EDBD4"/>
-            </a:solidFill>
-          </a:ln>
-          <a:effectLst/>
-        </p:spPr>
-      </p:cxnSp>
-      <p:cxnSp>
-        <p:nvCxnSpPr>
-          <p:cNvPr id="37" name="line36" descr="sci-ppt:C2-E13-036"/>
-          <p:cNvCxnSpPr/>
-          <p:nvPr/>
-        </p:nvCxnSpPr>
-        <p:spPr>
-          <a:xfrm flipV="1">
-            <a:off x="10383520" y="1789785"/>
-            <a:ext cx="142239" cy="138989"/>
-          </a:xfrm>
-          <a:prstGeom prst="line">
-            <a:avLst/>
-          </a:prstGeom>
-          <a:ln w="25400">
-            <a:solidFill>
-              <a:srgbClr val="8EDBD4"/>
-            </a:solidFill>
-          </a:ln>
-          <a:effectLst/>
-        </p:spPr>
-      </p:cxnSp>
-      <p:cxnSp>
-        <p:nvCxnSpPr>
-          <p:cNvPr id="38" name="line37" descr="sci-ppt:C2-E13-037"/>
-          <p:cNvCxnSpPr/>
-          <p:nvPr/>
-        </p:nvCxnSpPr>
-        <p:spPr>
-          <a:xfrm flipV="1">
-            <a:off x="10525759" y="1645920"/>
-            <a:ext cx="142241" cy="143865"/>
-          </a:xfrm>
-          <a:prstGeom prst="line">
-            <a:avLst/>
-          </a:prstGeom>
-          <a:ln w="25400">
-            <a:solidFill>
-              <a:srgbClr val="8EDBD4"/>
-            </a:solidFill>
-          </a:ln>
-          <a:effectLst/>
-        </p:spPr>
-      </p:cxnSp>
-      <p:sp>
-        <p:nvSpPr>
-          <p:cNvPr id="39" name="text38" descr="sci-ppt:C2-E13-038"/>
+        <p:txBody>
+          <a:bodyPr rtlCol="0" anchor="ctr"/>
+          <a:lstStyle/>
+          <a:p>
+            <a:pPr algn="ctr"/>
+          </a:p>
+        </p:txBody>
+      </p:sp>
+      <p:sp>
+        <p:nvSpPr>
+          <p:cNvPr id="59" name="C2-E13 text 57" descr="sci-ppt:o057"/>
           <p:cNvSpPr txBox="1"/>
           <p:nvPr/>
         </p:nvSpPr>
         <p:spPr>
           <a:xfrm>
-            <a:off x="975360" y="3474720"/>
-            <a:ext cx="5242560" cy="340156"/>
+            <a:off x="914400" y="5733288"/>
+            <a:ext cx="10972800" cy="239395"/>
           </a:xfrm>
           <a:prstGeom prst="rect">
             <a:avLst/>
@@ -4014,7 +5884,7 @@
           <a:effectLst/>
         </p:spPr>
         <p:txBody>
-          <a:bodyPr wrap="none" lIns="27432" rIns="27432" tIns="18288" bIns="18288" anchor="ctr">
+          <a:bodyPr wrap="none" lIns="18288" rIns="18288" tIns="18288" bIns="18288" anchor="t">
             <a:spAutoFit/>
           </a:bodyPr>
           <a:lstStyle/>
@@ -4025,27 +5895,27 @@
               </a:spcAft>
             </a:pPr>
             <a:r>
-              <a:rPr sz="1728" b="0" i="0">
+              <a:rPr sz="1250" b="0" i="0">
                 <a:solidFill>
                   <a:srgbClr val="E7F0F3"/>
                 </a:solidFill>
                 <a:latin typeface="Arial"/>
               </a:rPr>
-              <a:t>Schematic trend within stated fit ranges</a:t>
-            </a:r>
-          </a:p>
-        </p:txBody>
-      </p:sp>
-      <p:sp>
-        <p:nvSpPr>
-          <p:cNvPr id="40" name="text39" descr="sci-ppt:C2-E13-039"/>
+              <a:t>Both correlations use log₁₀(p / 10⁵ Pa) = A − B / (T − C) with different A, B, C for each substance and branch.</a:t>
+            </a:r>
+          </a:p>
+        </p:txBody>
+      </p:sp>
+      <p:sp>
+        <p:nvSpPr>
+          <p:cNvPr id="60" name="C2-E13 text 58" descr="sci-ppt:o058"/>
           <p:cNvSpPr txBox="1"/>
           <p:nvPr/>
         </p:nvSpPr>
         <p:spPr>
           <a:xfrm>
-            <a:off x="975360" y="3048000"/>
-            <a:ext cx="4876800" cy="359054"/>
+            <a:off x="320040" y="6510528"/>
+            <a:ext cx="11521440" cy="200660"/>
           </a:xfrm>
           <a:prstGeom prst="rect">
             <a:avLst/>
@@ -4054,7 +5924,7 @@
           <a:effectLst/>
         </p:spPr>
         <p:txBody>
-          <a:bodyPr wrap="none" lIns="27432" rIns="27432" tIns="18288" bIns="18288" anchor="ctr">
+          <a:bodyPr wrap="none" lIns="18288" rIns="18288" tIns="18288" bIns="18288" anchor="t">
             <a:spAutoFit/>
           </a:bodyPr>
           <a:lstStyle/>
@@ -4065,333 +5935,13 @@
               </a:spcAft>
             </a:pPr>
             <a:r>
-              <a:rPr sz="1823" b="0" i="0">
-                <a:solidFill>
-                  <a:srgbClr val="F6BC77"/>
-                </a:solidFill>
-                <a:latin typeface="Arial"/>
-              </a:rPr>
-              <a:t>Not an activation threshold</a:t>
-            </a:r>
-          </a:p>
-        </p:txBody>
-      </p:sp>
-      <p:sp>
-        <p:nvSpPr>
-          <p:cNvPr id="41" name="text40" descr="sci-ppt:C2-E13-040"/>
-          <p:cNvSpPr txBox="1"/>
-          <p:nvPr/>
-        </p:nvSpPr>
-        <p:spPr>
-          <a:xfrm>
-            <a:off x="365760" y="4974336"/>
-            <a:ext cx="5547360" cy="321259"/>
-          </a:xfrm>
-          <a:prstGeom prst="rect">
-            <a:avLst/>
-          </a:prstGeom>
-          <a:noFill/>
-          <a:effectLst/>
-        </p:spPr>
-        <p:txBody>
-          <a:bodyPr wrap="none" lIns="27432" rIns="27432" tIns="18288" bIns="18288" anchor="ctr">
-            <a:spAutoFit/>
-          </a:bodyPr>
-          <a:lstStyle/>
-          <a:p>
-            <a:pPr algn="l">
-              <a:spcAft>
-                <a:spcPts val="0"/>
-              </a:spcAft>
-            </a:pPr>
-            <a:r>
-              <a:rPr sz="1632" b="0" i="0">
-                <a:solidFill>
-                  <a:srgbClr val="E7F0F3"/>
-                </a:solidFill>
-                <a:latin typeface="Arial"/>
-              </a:rPr>
-              <a:t>T: water temperature</a:t>
-            </a:r>
-          </a:p>
-        </p:txBody>
-      </p:sp>
-      <p:sp>
-        <p:nvSpPr>
-          <p:cNvPr id="42" name="text41" descr="sci-ppt:C2-E13-041"/>
-          <p:cNvSpPr txBox="1"/>
-          <p:nvPr/>
-        </p:nvSpPr>
-        <p:spPr>
-          <a:xfrm>
-            <a:off x="365760" y="5266944"/>
-            <a:ext cx="5547360" cy="321259"/>
-          </a:xfrm>
-          <a:prstGeom prst="rect">
-            <a:avLst/>
-          </a:prstGeom>
-          <a:noFill/>
-          <a:effectLst/>
-        </p:spPr>
-        <p:txBody>
-          <a:bodyPr wrap="none" lIns="27432" rIns="27432" tIns="18288" bIns="18288" anchor="ctr">
-            <a:spAutoFit/>
-          </a:bodyPr>
-          <a:lstStyle/>
-          <a:p>
-            <a:pPr algn="l">
-              <a:spcAft>
-                <a:spcPts val="0"/>
-              </a:spcAft>
-            </a:pPr>
-            <a:r>
-              <a:rPr sz="1632" b="0" i="0">
-                <a:solidFill>
-                  <a:srgbClr val="E7F0F3"/>
-                </a:solidFill>
-                <a:latin typeface="Arial"/>
-              </a:rPr>
-              <a:t>273–303 K; 304–333 K: separate branches</a:t>
-            </a:r>
-          </a:p>
-        </p:txBody>
-      </p:sp>
-      <p:sp>
-        <p:nvSpPr>
-          <p:cNvPr id="43" name="text42" descr="sci-ppt:C2-E13-042"/>
-          <p:cNvSpPr txBox="1"/>
-          <p:nvPr/>
-        </p:nvSpPr>
-        <p:spPr>
-          <a:xfrm>
-            <a:off x="365760" y="5559552"/>
-            <a:ext cx="5547360" cy="321259"/>
-          </a:xfrm>
-          <a:prstGeom prst="rect">
-            <a:avLst/>
-          </a:prstGeom>
-          <a:noFill/>
-          <a:effectLst/>
-        </p:spPr>
-        <p:txBody>
-          <a:bodyPr wrap="none" lIns="27432" rIns="27432" tIns="18288" bIns="18288" anchor="ctr">
-            <a:spAutoFit/>
-          </a:bodyPr>
-          <a:lstStyle/>
-          <a:p>
-            <a:pPr algn="l">
-              <a:spcAft>
-                <a:spcPts val="0"/>
-              </a:spcAft>
-            </a:pPr>
-            <a:r>
-              <a:rPr sz="1632" b="0" i="0">
-                <a:solidFill>
-                  <a:srgbClr val="E7F0F3"/>
-                </a:solidFill>
-                <a:latin typeface="Arial"/>
-              </a:rPr>
-              <a:t>5.40221, 1838.675 K, 31.737 K</a:t>
-            </a:r>
-          </a:p>
-        </p:txBody>
-      </p:sp>
-      <p:sp>
-        <p:nvSpPr>
-          <p:cNvPr id="44" name="text43" descr="sci-ppt:C2-E13-043"/>
-          <p:cNvSpPr txBox="1"/>
-          <p:nvPr/>
-        </p:nvSpPr>
-        <p:spPr>
-          <a:xfrm>
-            <a:off x="6156960" y="4974336"/>
-            <a:ext cx="5547360" cy="321259"/>
-          </a:xfrm>
-          <a:prstGeom prst="rect">
-            <a:avLst/>
-          </a:prstGeom>
-          <a:noFill/>
-          <a:effectLst/>
-        </p:spPr>
-        <p:txBody>
-          <a:bodyPr wrap="none" lIns="27432" rIns="27432" tIns="18288" bIns="18288" anchor="ctr">
-            <a:spAutoFit/>
-          </a:bodyPr>
-          <a:lstStyle/>
-          <a:p>
-            <a:pPr algn="l">
-              <a:spcAft>
-                <a:spcPts val="0"/>
-              </a:spcAft>
-            </a:pPr>
-            <a:r>
-              <a:rPr sz="1632" b="0" i="0">
-                <a:solidFill>
-                  <a:srgbClr val="E7F0F3"/>
-                </a:solidFill>
-                <a:latin typeface="Arial"/>
-              </a:rPr>
-              <a:t>p_sat,w: water equilibrium pressure</a:t>
-            </a:r>
-          </a:p>
-        </p:txBody>
-      </p:sp>
-      <p:sp>
-        <p:nvSpPr>
-          <p:cNvPr id="45" name="text44" descr="sci-ppt:C2-E13-044"/>
-          <p:cNvSpPr txBox="1"/>
-          <p:nvPr/>
-        </p:nvSpPr>
-        <p:spPr>
-          <a:xfrm>
-            <a:off x="6156960" y="5266944"/>
-            <a:ext cx="5547360" cy="321259"/>
-          </a:xfrm>
-          <a:prstGeom prst="rect">
-            <a:avLst/>
-          </a:prstGeom>
-          <a:noFill/>
-          <a:effectLst/>
-        </p:spPr>
-        <p:txBody>
-          <a:bodyPr wrap="none" lIns="27432" rIns="27432" tIns="18288" bIns="18288" anchor="ctr">
-            <a:spAutoFit/>
-          </a:bodyPr>
-          <a:lstStyle/>
-          <a:p>
-            <a:pPr algn="l">
-              <a:spcAft>
-                <a:spcPts val="0"/>
-              </a:spcAft>
-            </a:pPr>
-            <a:r>
-              <a:rPr sz="1632" b="0" i="0">
-                <a:solidFill>
-                  <a:srgbClr val="E7F0F3"/>
-                </a:solidFill>
-                <a:latin typeface="Arial"/>
-              </a:rPr>
-              <a:t>10⁵ Pa: pressure reference</a:t>
-            </a:r>
-          </a:p>
-        </p:txBody>
-      </p:sp>
-      <p:sp>
-        <p:nvSpPr>
-          <p:cNvPr id="46" name="text45" descr="sci-ppt:C2-E13-045"/>
-          <p:cNvSpPr txBox="1"/>
-          <p:nvPr/>
-        </p:nvSpPr>
-        <p:spPr>
-          <a:xfrm>
-            <a:off x="6156960" y="5559552"/>
-            <a:ext cx="5547360" cy="321259"/>
-          </a:xfrm>
-          <a:prstGeom prst="rect">
-            <a:avLst/>
-          </a:prstGeom>
-          <a:noFill/>
-          <a:effectLst/>
-        </p:spPr>
-        <p:txBody>
-          <a:bodyPr wrap="none" lIns="27432" rIns="27432" tIns="18288" bIns="18288" anchor="ctr">
-            <a:spAutoFit/>
-          </a:bodyPr>
-          <a:lstStyle/>
-          <a:p>
-            <a:pPr algn="l">
-              <a:spcAft>
-                <a:spcPts val="0"/>
-              </a:spcAft>
-            </a:pPr>
-            <a:r>
-              <a:rPr sz="1632" b="0" i="0">
-                <a:solidFill>
-                  <a:srgbClr val="E7F0F3"/>
-                </a:solidFill>
-                <a:latin typeface="Arial"/>
-              </a:rPr>
-              <a:t>5.20389, 1733.926 K, 39.485 K</a:t>
-            </a:r>
-          </a:p>
-        </p:txBody>
-      </p:sp>
-      <p:sp>
-        <p:nvSpPr>
-          <p:cNvPr id="47" name="text46" descr="sci-ppt:C2-E13-046"/>
-          <p:cNvSpPr txBox="1"/>
-          <p:nvPr/>
-        </p:nvSpPr>
-        <p:spPr>
-          <a:xfrm>
-            <a:off x="365760" y="6278880"/>
-            <a:ext cx="11277600" cy="302361"/>
-          </a:xfrm>
-          <a:prstGeom prst="rect">
-            <a:avLst/>
-          </a:prstGeom>
-          <a:noFill/>
-          <a:effectLst/>
-        </p:spPr>
-        <p:txBody>
-          <a:bodyPr wrap="none" lIns="27432" rIns="27432" tIns="18288" bIns="18288" anchor="ctr">
-            <a:spAutoFit/>
-          </a:bodyPr>
-          <a:lstStyle/>
-          <a:p>
-            <a:pPr algn="l">
-              <a:spcAft>
-                <a:spcPts val="0"/>
-              </a:spcAft>
-            </a:pPr>
-            <a:r>
-              <a:rPr sz="1536" b="0" i="0">
+              <a:rPr sz="1000" b="0" i="0">
                 <a:solidFill>
                   <a:srgbClr val="B4C7D2"/>
                 </a:solidFill>
                 <a:latin typeface="Arial"/>
               </a:rPr>
-              <a:t>Use the coefficient branch belonging to the temperature</a:t>
-            </a:r>
-          </a:p>
-        </p:txBody>
-      </p:sp>
-      <p:sp>
-        <p:nvSpPr>
-          <p:cNvPr id="48" name="text47" descr="sci-ppt:C2-E13-047"/>
-          <p:cNvSpPr txBox="1"/>
-          <p:nvPr/>
-        </p:nvSpPr>
-        <p:spPr>
-          <a:xfrm>
-            <a:off x="365760" y="6571488"/>
-            <a:ext cx="11277600" cy="302361"/>
-          </a:xfrm>
-          <a:prstGeom prst="rect">
-            <a:avLst/>
-          </a:prstGeom>
-          <a:noFill/>
-          <a:effectLst/>
-        </p:spPr>
-        <p:txBody>
-          <a:bodyPr wrap="none" lIns="27432" rIns="27432" tIns="18288" bIns="18288" anchor="ctr">
-            <a:spAutoFit/>
-          </a:bodyPr>
-          <a:lstStyle/>
-          <a:p>
-            <a:pPr algn="l">
-              <a:spcAft>
-                <a:spcPts val="0"/>
-              </a:spcAft>
-            </a:pPr>
-            <a:r>
-              <a:rPr sz="1536" b="0" i="0">
-                <a:solidFill>
-                  <a:srgbClr val="B4C7D2"/>
-                </a:solidFill>
-                <a:latin typeface="Arial"/>
-              </a:rPr>
-              <a:t>The hot PFC and carrier may have different local temperatures</a:t>
+              <a:t>Correlations of Eqs. C2-E12 and C2-E13 (log scale).</a:t>
             </a:r>
           </a:p>
         </p:txBody>
